--- a/templates/proposal_template.pptx
+++ b/templates/proposal_template.pptx
@@ -1597,11 +1597,8 @@
           <a:solidFill>
             <a:srgbClr val="F2F8FA"/>
           </a:solidFill>
-          <a:ln w="12700">
-            <a:solidFill>
-              <a:srgbClr val="333333"/>
-            </a:solidFill>
-            <a:prstDash val="solid"/>
+          <a:ln>
+            <a:noFill/>
           </a:ln>
         </p:spPr>
       </p:sp>
@@ -1619,173 +1616,11 @@
           <a:prstGeom prst="rect">
             <a:avLst/>
           </a:prstGeom>
-          <a:ln w="12700">
-            <a:solidFill>
-              <a:srgbClr val="333333"/>
-            </a:solidFill>
-            <a:prstDash val="solid"/>
-          </a:ln>
-        </p:spPr>
-      </p:sp>
-      <p:sp>
-        <p:nvSpPr>
-          <p:cNvPr id="4" name="Shape 2"/>
-          <p:cNvSpPr/>
-          <p:nvPr/>
-        </p:nvSpPr>
-        <p:spPr>
-          <a:xfrm>
-            <a:off x="-731520" y="3931920"/>
-            <a:ext cx="4389120" cy="4389120"/>
-          </a:xfrm>
-          <a:prstGeom prst="ellipse">
-            <a:avLst/>
-          </a:prstGeom>
-          <a:solidFill>
-            <a:srgbClr val="0098BB">
-              <a:alpha val="22000"/>
-            </a:srgbClr>
-          </a:solidFill>
-          <a:ln w="12700">
-            <a:solidFill>
-              <a:srgbClr val="333333"/>
-            </a:solidFill>
-            <a:prstDash val="solid"/>
-          </a:ln>
-        </p:spPr>
-      </p:sp>
-      <p:sp>
-        <p:nvSpPr>
-          <p:cNvPr id="5" name="Shape 3"/>
-          <p:cNvSpPr/>
-          <p:nvPr/>
-        </p:nvSpPr>
-        <p:spPr>
-          <a:xfrm>
-            <a:off x="2377440" y="-548640"/>
-            <a:ext cx="2743200" cy="2743200"/>
-          </a:xfrm>
-          <a:prstGeom prst="ellipse">
-            <a:avLst/>
-          </a:prstGeom>
-          <a:solidFill>
-            <a:srgbClr val="00B8D9">
-              <a:alpha val="18000"/>
-            </a:srgbClr>
-          </a:solidFill>
-          <a:ln w="12700">
-            <a:solidFill>
-              <a:srgbClr val="333333"/>
-            </a:solidFill>
-            <a:prstDash val="solid"/>
-          </a:ln>
-        </p:spPr>
-      </p:sp>
-      <p:sp>
-        <p:nvSpPr>
-          <p:cNvPr id="6" name="Shape 4"/>
-          <p:cNvSpPr/>
-          <p:nvPr/>
-        </p:nvSpPr>
-        <p:spPr>
-          <a:xfrm>
-            <a:off x="457200" y="1920240"/>
-            <a:ext cx="164592" cy="164592"/>
-          </a:xfrm>
-          <a:prstGeom prst="ellipse">
-            <a:avLst/>
-          </a:prstGeom>
-          <a:solidFill>
-            <a:srgbClr val="F0A000">
-              <a:alpha val="70000"/>
-            </a:srgbClr>
-          </a:solidFill>
-          <a:ln w="12700">
-            <a:solidFill>
-              <a:srgbClr val="333333"/>
-            </a:solidFill>
-            <a:prstDash val="solid"/>
-          </a:ln>
-        </p:spPr>
-      </p:sp>
-      <p:sp>
-        <p:nvSpPr>
-          <p:cNvPr id="7" name="Shape 5"/>
-          <p:cNvSpPr/>
-          <p:nvPr/>
-        </p:nvSpPr>
-        <p:spPr>
-          <a:xfrm>
-            <a:off x="868680" y="1920240"/>
-            <a:ext cx="109728" cy="109728"/>
-          </a:xfrm>
-          <a:prstGeom prst="ellipse">
-            <a:avLst/>
-          </a:prstGeom>
-          <a:solidFill>
-            <a:srgbClr val="F0A000">
-              <a:alpha val="70000"/>
-            </a:srgbClr>
-          </a:solidFill>
-          <a:ln w="12700">
-            <a:solidFill>
-              <a:srgbClr val="333333"/>
-            </a:solidFill>
-            <a:prstDash val="solid"/>
-          </a:ln>
-        </p:spPr>
-      </p:sp>
-      <p:sp>
-        <p:nvSpPr>
-          <p:cNvPr id="8" name="Shape 6"/>
-          <p:cNvSpPr/>
-          <p:nvPr/>
-        </p:nvSpPr>
-        <p:spPr>
-          <a:xfrm>
-            <a:off x="457200" y="2249424"/>
-            <a:ext cx="91440" cy="91440"/>
-          </a:xfrm>
-          <a:prstGeom prst="ellipse">
-            <a:avLst/>
-          </a:prstGeom>
-          <a:solidFill>
-            <a:srgbClr val="F0A000">
-              <a:alpha val="70000"/>
-            </a:srgbClr>
-          </a:solidFill>
-          <a:ln w="12700">
-            <a:solidFill>
-              <a:srgbClr val="333333"/>
-            </a:solidFill>
-            <a:prstDash val="solid"/>
-          </a:ln>
-        </p:spPr>
-      </p:sp>
-      <p:sp>
-        <p:nvSpPr>
-          <p:cNvPr id="9" name="Shape 7"/>
-          <p:cNvSpPr/>
-          <p:nvPr/>
-        </p:nvSpPr>
-        <p:spPr>
-          <a:xfrm>
-            <a:off x="457200" y="3200400"/>
-            <a:ext cx="201168" cy="201168"/>
-          </a:xfrm>
-          <a:prstGeom prst="ellipse">
-            <a:avLst/>
-          </a:prstGeom>
-          <a:solidFill>
-            <a:srgbClr val="F0A000">
-              <a:alpha val="70000"/>
-            </a:srgbClr>
-          </a:solidFill>
-          <a:ln w="12700">
-            <a:solidFill>
-              <a:srgbClr val="333333"/>
-            </a:solidFill>
-            <a:prstDash val="solid"/>
+          <a:solidFill>
+            <a:srgbClr val="0098BB"/>
+          </a:solidFill>
+          <a:ln>
+            <a:noFill/>
           </a:ln>
         </p:spPr>
       </p:sp>
@@ -1804,55 +1639,57 @@
             <a:avLst/>
           </a:prstGeom>
           <a:solidFill>
-            <a:srgbClr val="F0A000"/>
-          </a:solidFill>
-          <a:ln w="12700">
-            <a:solidFill>
-              <a:srgbClr val="333333"/>
-            </a:solidFill>
-            <a:prstDash val="solid"/>
-          </a:ln>
-        </p:spPr>
-      </p:sp>
-      <p:sp>
-        <p:nvSpPr>
-          <p:cNvPr id="11" name="Text 9"/>
-          <p:cNvSpPr/>
-          <p:nvPr/>
-        </p:nvSpPr>
+            <a:srgbClr val="0098BB"/>
+          </a:solidFill>
+          <a:ln>
+            <a:noFill/>
+          </a:ln>
+        </p:spPr>
+      </p:sp>
+      <p:pic>
+        <p:nvPicPr>
+          <p:cNvPr id="11" name="Logo Icon"/>
+          <p:cNvPicPr/>
+          <p:nvPr/>
+        </p:nvPicPr>
+        <p:blipFill>
+          <a:blip r:embed="rId3"/>
+          <a:stretch>
+            <a:fillRect/>
+          </a:stretch>
+        </p:blipFill>
         <p:spPr>
           <a:xfrm>
             <a:off x="384048" y="347472"/>
-            <a:ext cx="3840480" cy="475488"/>
-          </a:xfrm>
-          <a:prstGeom prst="rect">
-            <a:avLst/>
-          </a:prstGeom>
-          <a:noFill/>
-          <a:ln/>
-        </p:spPr>
-        <p:txBody>
-          <a:bodyPr wrap="square" rtlCol="0" anchor="ctr"/>
-          <a:lstStyle/>
-          <a:p>
-            <a:pPr indent="0" marL="0">
-              <a:buNone/>
-            </a:pPr>
-            <a:r>
-              <a:rPr lang="en-US" sz="1700" b="1" dirty="0">
-                <a:solidFill>
-                  <a:srgbClr val="FFFFFF"/>
-                </a:solidFill>
-                <a:latin typeface="Meiryo UI" pitchFamily="34" charset="0"/>
-                <a:ea typeface="Meiryo UI" pitchFamily="34" charset="-122"/>
-                <a:cs typeface="Meiryo UI" pitchFamily="34" charset="-120"/>
-              </a:rPr>
-              <a:t>Novagrid</a:t>
-            </a:r>
-            <a:endParaRPr lang="en-US" sz="1700" dirty="0"/>
-          </a:p>
-        </p:txBody>
-      </p:sp>
+            <a:ext cx="950000" cy="587000"/>
+          </a:xfrm>
+          <a:prstGeom prst="rect">
+            <a:avLst/>
+          </a:prstGeom>
+        </p:spPr>
+      </p:pic>
+      <p:pic>
+        <p:nvPicPr>
+          <p:cNvPr id="25" name="Logo Wordmark"/>
+          <p:cNvPicPr/>
+          <p:nvPr/>
+        </p:nvPicPr>
+        <p:blipFill>
+          <a:blip r:embed="rId4"/>
+          <a:stretch>
+            <a:fillRect/>
+          </a:stretch>
+        </p:blipFill>
+        <p:spPr>
+          <a:xfrm>
+            <a:off x="384048" y="994472"/>
+            <a:ext cx="820000" cy="76000"/>
+          </a:xfrm>
+          <a:prstGeom prst="rect">
+            <a:avLst/>
+          </a:prstGeom>
+        </p:spPr>
+      </p:pic>
       <p:sp>
         <p:nvSpPr>
           <p:cNvPr id="12" name="Shape 10"/>
@@ -1861,7 +1698,7 @@
         </p:nvSpPr>
         <p:spPr>
           <a:xfrm>
-            <a:off x="384048" y="841248"/>
+            <a:off x="384048" y="1188720"/>
             <a:ext cx="1645920" cy="45720"/>
           </a:xfrm>
           <a:prstGeom prst="rect">
@@ -1872,11 +1709,8 @@
               <a:alpha val="45000"/>
             </a:srgbClr>
           </a:solidFill>
-          <a:ln w="12700">
-            <a:solidFill>
-              <a:srgbClr val="333333"/>
-            </a:solidFill>
-            <a:prstDash val="solid"/>
+          <a:ln>
+            <a:noFill/>
           </a:ln>
         </p:spPr>
       </p:sp>
@@ -1895,13 +1729,10 @@
             <a:avLst/>
           </a:prstGeom>
           <a:solidFill>
-            <a:srgbClr val="F0A000"/>
-          </a:solidFill>
-          <a:ln w="12700">
-            <a:solidFill>
-              <a:srgbClr val="333333"/>
-            </a:solidFill>
-            <a:prstDash val="solid"/>
+            <a:srgbClr val="0098BB"/>
+          </a:solidFill>
+          <a:ln>
+            <a:noFill/>
           </a:ln>
         </p:spPr>
       </p:sp>
@@ -1934,9 +1765,9 @@
                 <a:solidFill>
                   <a:srgbClr val="AADDE8"/>
                 </a:solidFill>
-                <a:latin typeface="Meiryo UI" pitchFamily="34" charset="0"/>
-                <a:ea typeface="Meiryo UI" pitchFamily="34" charset="-122"/>
-                <a:cs typeface="Meiryo UI" pitchFamily="34" charset="-120"/>
+                <a:latin typeface="Meiryo" pitchFamily="34" charset="0"/>
+                <a:ea typeface="Meiryo" pitchFamily="34" charset="-122"/>
+                <a:cs typeface="Meiryo" pitchFamily="34" charset="-120"/>
               </a:rPr>
               <a:t>BUSINESS PROPOSAL</a:t>
             </a:r>
@@ -1973,9 +1804,9 @@
                 <a:solidFill>
                   <a:srgbClr val="FFFFFF"/>
                 </a:solidFill>
-                <a:latin typeface="Meiryo UI" pitchFamily="34" charset="0"/>
-                <a:ea typeface="Meiryo UI" pitchFamily="34" charset="-122"/>
-                <a:cs typeface="Meiryo UI" pitchFamily="34" charset="-120"/>
+                <a:latin typeface="Meiryo" pitchFamily="34" charset="0"/>
+                <a:ea typeface="Meiryo" pitchFamily="34" charset="-122"/>
+                <a:cs typeface="Meiryo" pitchFamily="34" charset="-120"/>
               </a:rPr>
               <a:t>{{DATE}}</a:t>
             </a:r>
@@ -2000,11 +1831,8 @@
           <a:solidFill>
             <a:srgbClr val="0098BB"/>
           </a:solidFill>
-          <a:ln w="12700">
-            <a:solidFill>
-              <a:srgbClr val="333333"/>
-            </a:solidFill>
-            <a:prstDash val="solid"/>
+          <a:ln>
+            <a:noFill/>
           </a:ln>
         </p:spPr>
       </p:sp>
@@ -2037,9 +1865,9 @@
                 <a:solidFill>
                   <a:srgbClr val="006F8A"/>
                 </a:solidFill>
-                <a:latin typeface="Meiryo UI" pitchFamily="34" charset="0"/>
-                <a:ea typeface="Meiryo UI" pitchFamily="34" charset="-122"/>
-                <a:cs typeface="Meiryo UI" pitchFamily="34" charset="-120"/>
+                <a:latin typeface="Meiryo" pitchFamily="34" charset="0"/>
+                <a:ea typeface="Meiryo" pitchFamily="34" charset="-122"/>
+                <a:cs typeface="Meiryo" pitchFamily="34" charset="-120"/>
               </a:rPr>
               <a:t>{{CLIENT_NAME}} 御中</a:t>
             </a:r>
@@ -2079,9 +1907,9 @@
                 <a:solidFill>
                   <a:srgbClr val="1A2E35"/>
                 </a:solidFill>
-                <a:latin typeface="Meiryo UI" pitchFamily="34" charset="0"/>
-                <a:ea typeface="Meiryo UI" pitchFamily="34" charset="-122"/>
-                <a:cs typeface="Meiryo UI" pitchFamily="34" charset="-120"/>
+                <a:latin typeface="Meiryo" pitchFamily="34" charset="0"/>
+                <a:ea typeface="Meiryo" pitchFamily="34" charset="-122"/>
+                <a:cs typeface="Meiryo" pitchFamily="34" charset="-120"/>
               </a:rPr>
               <a:t>{{PROPOSAL_TITLE}}</a:t>
             </a:r>
@@ -2104,13 +1932,10 @@
             <a:avLst/>
           </a:prstGeom>
           <a:solidFill>
-            <a:srgbClr val="F0A000"/>
-          </a:solidFill>
-          <a:ln w="12700">
-            <a:solidFill>
-              <a:srgbClr val="333333"/>
-            </a:solidFill>
-            <a:prstDash val="solid"/>
+            <a:srgbClr val="0098BB"/>
+          </a:solidFill>
+          <a:ln>
+            <a:noFill/>
           </a:ln>
         </p:spPr>
       </p:sp>
@@ -2146,9 +1971,9 @@
                 <a:solidFill>
                   <a:srgbClr val="2C4A52"/>
                 </a:solidFill>
-                <a:latin typeface="Meiryo UI" pitchFamily="34" charset="0"/>
-                <a:ea typeface="Meiryo UI" pitchFamily="34" charset="-122"/>
-                <a:cs typeface="Meiryo UI" pitchFamily="34" charset="-120"/>
+                <a:latin typeface="Meiryo" pitchFamily="34" charset="0"/>
+                <a:ea typeface="Meiryo" pitchFamily="34" charset="-122"/>
+                <a:cs typeface="Meiryo" pitchFamily="34" charset="-120"/>
               </a:rPr>
               <a:t>{{PROPOSAL_SUBTITLE}}</a:t>
             </a:r>
@@ -2173,11 +1998,8 @@
           <a:solidFill>
             <a:srgbClr val="E0F4FA"/>
           </a:solidFill>
-          <a:ln w="12700">
-            <a:solidFill>
-              <a:srgbClr val="333333"/>
-            </a:solidFill>
-            <a:prstDash val="solid"/>
+          <a:ln>
+            <a:noFill/>
           </a:ln>
         </p:spPr>
       </p:sp>
@@ -2198,11 +2020,8 @@
           <a:solidFill>
             <a:srgbClr val="0098BB"/>
           </a:solidFill>
-          <a:ln w="12700">
-            <a:solidFill>
-              <a:srgbClr val="333333"/>
-            </a:solidFill>
-            <a:prstDash val="solid"/>
+          <a:ln>
+            <a:noFill/>
           </a:ln>
         </p:spPr>
       </p:sp>
@@ -2235,9 +2054,9 @@
                 <a:solidFill>
                   <a:srgbClr val="7B9BA6"/>
                 </a:solidFill>
-                <a:latin typeface="Meiryo UI" pitchFamily="34" charset="0"/>
-                <a:ea typeface="Meiryo UI" pitchFamily="34" charset="-122"/>
-                <a:cs typeface="Meiryo UI" pitchFamily="34" charset="-120"/>
+                <a:latin typeface="Meiryo" pitchFamily="34" charset="0"/>
+                <a:ea typeface="Meiryo" pitchFamily="34" charset="-122"/>
+                <a:cs typeface="Meiryo" pitchFamily="34" charset="-120"/>
               </a:rPr>
               <a:t>提案者</a:t>
             </a:r>
@@ -2274,9 +2093,9 @@
                 <a:solidFill>
                   <a:srgbClr val="006F8A"/>
                 </a:solidFill>
-                <a:latin typeface="Meiryo UI" pitchFamily="34" charset="0"/>
-                <a:ea typeface="Meiryo UI" pitchFamily="34" charset="-122"/>
-                <a:cs typeface="Meiryo UI" pitchFamily="34" charset="-120"/>
+                <a:latin typeface="Meiryo" pitchFamily="34" charset="0"/>
+                <a:ea typeface="Meiryo" pitchFamily="34" charset="-122"/>
+                <a:cs typeface="Meiryo" pitchFamily="34" charset="-120"/>
               </a:rPr>
               <a:t>{{YOUR_COMPANY}}</a:t>
             </a:r>
@@ -2326,11 +2145,8 @@
           <a:solidFill>
             <a:srgbClr val="F4FBFD"/>
           </a:solidFill>
-          <a:ln w="12700">
-            <a:solidFill>
-              <a:srgbClr val="333333"/>
-            </a:solidFill>
-            <a:prstDash val="solid"/>
+          <a:ln>
+            <a:noFill/>
           </a:ln>
         </p:spPr>
       </p:sp>
@@ -2351,11 +2167,8 @@
           <a:solidFill>
             <a:srgbClr val="006F8A"/>
           </a:solidFill>
-          <a:ln w="12700">
-            <a:solidFill>
-              <a:srgbClr val="333333"/>
-            </a:solidFill>
-            <a:prstDash val="solid"/>
+          <a:ln>
+            <a:noFill/>
           </a:ln>
         </p:spPr>
       </p:sp>
@@ -2374,13 +2187,10 @@
             <a:avLst/>
           </a:prstGeom>
           <a:solidFill>
-            <a:srgbClr val="F0A000"/>
-          </a:solidFill>
-          <a:ln w="12700">
-            <a:solidFill>
-              <a:srgbClr val="333333"/>
-            </a:solidFill>
-            <a:prstDash val="solid"/>
+            <a:srgbClr val="0098BB"/>
+          </a:solidFill>
+          <a:ln>
+            <a:noFill/>
           </a:ln>
         </p:spPr>
       </p:sp>
@@ -2413,9 +2223,9 @@
                 <a:solidFill>
                   <a:srgbClr val="FFFFFF"/>
                 </a:solidFill>
-                <a:latin typeface="Meiryo UI" pitchFamily="34" charset="0"/>
-                <a:ea typeface="Meiryo UI" pitchFamily="34" charset="-122"/>
-                <a:cs typeface="Meiryo UI" pitchFamily="34" charset="-120"/>
+                <a:latin typeface="Meiryo" pitchFamily="34" charset="0"/>
+                <a:ea typeface="Meiryo" pitchFamily="34" charset="-122"/>
+                <a:cs typeface="Meiryo" pitchFamily="34" charset="-120"/>
               </a:rPr>
               <a:t>AGENDA</a:t>
             </a:r>
@@ -2440,11 +2250,8 @@
           <a:solidFill>
             <a:srgbClr val="006F8A"/>
           </a:solidFill>
-          <a:ln w="12700">
-            <a:solidFill>
-              <a:srgbClr val="333333"/>
-            </a:solidFill>
-            <a:prstDash val="solid"/>
+          <a:ln>
+            <a:noFill/>
           </a:ln>
         </p:spPr>
       </p:sp>
@@ -2477,9 +2284,9 @@
                 <a:solidFill>
                   <a:srgbClr val="AADDE8"/>
                 </a:solidFill>
-                <a:latin typeface="Meiryo UI" pitchFamily="34" charset="0"/>
-                <a:ea typeface="Meiryo UI" pitchFamily="34" charset="-122"/>
-                <a:cs typeface="Meiryo UI" pitchFamily="34" charset="-120"/>
+                <a:latin typeface="Meiryo" pitchFamily="34" charset="0"/>
+                <a:ea typeface="Meiryo" pitchFamily="34" charset="-122"/>
+                <a:cs typeface="Meiryo" pitchFamily="34" charset="-120"/>
               </a:rPr>
               <a:t>Novagrid</a:t>
             </a:r>
@@ -2516,9 +2323,9 @@
                 <a:solidFill>
                   <a:srgbClr val="AADDE8"/>
                 </a:solidFill>
-                <a:latin typeface="Meiryo UI" pitchFamily="34" charset="0"/>
-                <a:ea typeface="Meiryo UI" pitchFamily="34" charset="-122"/>
-                <a:cs typeface="Meiryo UI" pitchFamily="34" charset="-120"/>
+                <a:latin typeface="Meiryo" pitchFamily="34" charset="0"/>
+                <a:ea typeface="Meiryo" pitchFamily="34" charset="-122"/>
+                <a:cs typeface="Meiryo" pitchFamily="34" charset="-120"/>
               </a:rPr>
               <a:t>2 / 9</a:t>
             </a:r>
@@ -2582,9 +2389,9 @@
                 <a:solidFill>
                   <a:srgbClr val="0098BB"/>
                 </a:solidFill>
-                <a:latin typeface="Meiryo UI" pitchFamily="34" charset="0"/>
-                <a:ea typeface="Meiryo UI" pitchFamily="34" charset="-122"/>
-                <a:cs typeface="Meiryo UI" pitchFamily="34" charset="-120"/>
+                <a:latin typeface="Meiryo" pitchFamily="34" charset="0"/>
+                <a:ea typeface="Meiryo" pitchFamily="34" charset="-122"/>
+                <a:cs typeface="Meiryo" pitchFamily="34" charset="-120"/>
               </a:rPr>
               <a:t>01</a:t>
             </a:r>
@@ -2607,13 +2414,10 @@
             <a:avLst/>
           </a:prstGeom>
           <a:solidFill>
-            <a:srgbClr val="F0A000"/>
-          </a:solidFill>
-          <a:ln w="12700">
-            <a:solidFill>
-              <a:srgbClr val="333333"/>
-            </a:solidFill>
-            <a:prstDash val="solid"/>
+            <a:srgbClr val="0098BB"/>
+          </a:solidFill>
+          <a:ln>
+            <a:noFill/>
           </a:ln>
         </p:spPr>
       </p:sp>
@@ -2646,9 +2450,9 @@
                 <a:solidFill>
                   <a:srgbClr val="1A2E35"/>
                 </a:solidFill>
-                <a:latin typeface="Meiryo UI" pitchFamily="34" charset="0"/>
-                <a:ea typeface="Meiryo UI" pitchFamily="34" charset="-122"/>
-                <a:cs typeface="Meiryo UI" pitchFamily="34" charset="-120"/>
+                <a:latin typeface="Meiryo" pitchFamily="34" charset="0"/>
+                <a:ea typeface="Meiryo" pitchFamily="34" charset="-122"/>
+                <a:cs typeface="Meiryo" pitchFamily="34" charset="-120"/>
               </a:rPr>
               <a:t>現状と課題</a:t>
             </a:r>
@@ -2685,9 +2489,9 @@
                 <a:solidFill>
                   <a:srgbClr val="7B9BA6"/>
                 </a:solidFill>
-                <a:latin typeface="Meiryo UI" pitchFamily="34" charset="0"/>
-                <a:ea typeface="Meiryo UI" pitchFamily="34" charset="-122"/>
-                <a:cs typeface="Meiryo UI" pitchFamily="34" charset="-120"/>
+                <a:latin typeface="Meiryo" pitchFamily="34" charset="0"/>
+                <a:ea typeface="Meiryo" pitchFamily="34" charset="-122"/>
+                <a:cs typeface="Meiryo" pitchFamily="34" charset="-120"/>
               </a:rPr>
               <a:t>お客様が直面している経営課題の整理</a:t>
             </a:r>
@@ -2751,9 +2555,9 @@
                 <a:solidFill>
                   <a:srgbClr val="0098BB"/>
                 </a:solidFill>
-                <a:latin typeface="Meiryo UI" pitchFamily="34" charset="0"/>
-                <a:ea typeface="Meiryo UI" pitchFamily="34" charset="-122"/>
-                <a:cs typeface="Meiryo UI" pitchFamily="34" charset="-120"/>
+                <a:latin typeface="Meiryo" pitchFamily="34" charset="0"/>
+                <a:ea typeface="Meiryo" pitchFamily="34" charset="-122"/>
+                <a:cs typeface="Meiryo" pitchFamily="34" charset="-120"/>
               </a:rPr>
               <a:t>02</a:t>
             </a:r>
@@ -2776,13 +2580,10 @@
             <a:avLst/>
           </a:prstGeom>
           <a:solidFill>
-            <a:srgbClr val="F0A000"/>
-          </a:solidFill>
-          <a:ln w="12700">
-            <a:solidFill>
-              <a:srgbClr val="333333"/>
-            </a:solidFill>
-            <a:prstDash val="solid"/>
+            <a:srgbClr val="0098BB"/>
+          </a:solidFill>
+          <a:ln>
+            <a:noFill/>
           </a:ln>
         </p:spPr>
       </p:sp>
@@ -2815,9 +2616,9 @@
                 <a:solidFill>
                   <a:srgbClr val="1A2E35"/>
                 </a:solidFill>
-                <a:latin typeface="Meiryo UI" pitchFamily="34" charset="0"/>
-                <a:ea typeface="Meiryo UI" pitchFamily="34" charset="-122"/>
-                <a:cs typeface="Meiryo UI" pitchFamily="34" charset="-120"/>
+                <a:latin typeface="Meiryo" pitchFamily="34" charset="0"/>
+                <a:ea typeface="Meiryo" pitchFamily="34" charset="-122"/>
+                <a:cs typeface="Meiryo" pitchFamily="34" charset="-120"/>
               </a:rPr>
               <a:t>ご提案の概要</a:t>
             </a:r>
@@ -2854,9 +2655,9 @@
                 <a:solidFill>
                   <a:srgbClr val="7B9BA6"/>
                 </a:solidFill>
-                <a:latin typeface="Meiryo UI" pitchFamily="34" charset="0"/>
-                <a:ea typeface="Meiryo UI" pitchFamily="34" charset="-122"/>
-                <a:cs typeface="Meiryo UI" pitchFamily="34" charset="-120"/>
+                <a:latin typeface="Meiryo" pitchFamily="34" charset="0"/>
+                <a:ea typeface="Meiryo" pitchFamily="34" charset="-122"/>
+                <a:cs typeface="Meiryo" pitchFamily="34" charset="-120"/>
               </a:rPr>
               <a:t>解決アプローチと期待できるビジネス成果</a:t>
             </a:r>
@@ -2920,9 +2721,9 @@
                 <a:solidFill>
                   <a:srgbClr val="0098BB"/>
                 </a:solidFill>
-                <a:latin typeface="Meiryo UI" pitchFamily="34" charset="0"/>
-                <a:ea typeface="Meiryo UI" pitchFamily="34" charset="-122"/>
-                <a:cs typeface="Meiryo UI" pitchFamily="34" charset="-120"/>
+                <a:latin typeface="Meiryo" pitchFamily="34" charset="0"/>
+                <a:ea typeface="Meiryo" pitchFamily="34" charset="-122"/>
+                <a:cs typeface="Meiryo" pitchFamily="34" charset="-120"/>
               </a:rPr>
               <a:t>03</a:t>
             </a:r>
@@ -2945,13 +2746,10 @@
             <a:avLst/>
           </a:prstGeom>
           <a:solidFill>
-            <a:srgbClr val="F0A000"/>
-          </a:solidFill>
-          <a:ln w="12700">
-            <a:solidFill>
-              <a:srgbClr val="333333"/>
-            </a:solidFill>
-            <a:prstDash val="solid"/>
+            <a:srgbClr val="0098BB"/>
+          </a:solidFill>
+          <a:ln>
+            <a:noFill/>
           </a:ln>
         </p:spPr>
       </p:sp>
@@ -2984,9 +2782,9 @@
                 <a:solidFill>
                   <a:srgbClr val="1A2E35"/>
                 </a:solidFill>
-                <a:latin typeface="Meiryo UI" pitchFamily="34" charset="0"/>
-                <a:ea typeface="Meiryo UI" pitchFamily="34" charset="-122"/>
-                <a:cs typeface="Meiryo UI" pitchFamily="34" charset="-120"/>
+                <a:latin typeface="Meiryo" pitchFamily="34" charset="0"/>
+                <a:ea typeface="Meiryo" pitchFamily="34" charset="-122"/>
+                <a:cs typeface="Meiryo" pitchFamily="34" charset="-120"/>
               </a:rPr>
               <a:t>ソリューション詳細</a:t>
             </a:r>
@@ -3023,9 +2821,9 @@
                 <a:solidFill>
                   <a:srgbClr val="7B9BA6"/>
                 </a:solidFill>
-                <a:latin typeface="Meiryo UI" pitchFamily="34" charset="0"/>
-                <a:ea typeface="Meiryo UI" pitchFamily="34" charset="-122"/>
-                <a:cs typeface="Meiryo UI" pitchFamily="34" charset="-120"/>
+                <a:latin typeface="Meiryo" pitchFamily="34" charset="0"/>
+                <a:ea typeface="Meiryo" pitchFamily="34" charset="-122"/>
+                <a:cs typeface="Meiryo" pitchFamily="34" charset="-120"/>
               </a:rPr>
               <a:t>主要機能と業務変革効果</a:t>
             </a:r>
@@ -3089,9 +2887,9 @@
                 <a:solidFill>
                   <a:srgbClr val="0098BB"/>
                 </a:solidFill>
-                <a:latin typeface="Meiryo UI" pitchFamily="34" charset="0"/>
-                <a:ea typeface="Meiryo UI" pitchFamily="34" charset="-122"/>
-                <a:cs typeface="Meiryo UI" pitchFamily="34" charset="-120"/>
+                <a:latin typeface="Meiryo" pitchFamily="34" charset="0"/>
+                <a:ea typeface="Meiryo" pitchFamily="34" charset="-122"/>
+                <a:cs typeface="Meiryo" pitchFamily="34" charset="-120"/>
               </a:rPr>
               <a:t>04</a:t>
             </a:r>
@@ -3114,13 +2912,10 @@
             <a:avLst/>
           </a:prstGeom>
           <a:solidFill>
-            <a:srgbClr val="F0A000"/>
-          </a:solidFill>
-          <a:ln w="12700">
-            <a:solidFill>
-              <a:srgbClr val="333333"/>
-            </a:solidFill>
-            <a:prstDash val="solid"/>
+            <a:srgbClr val="0098BB"/>
+          </a:solidFill>
+          <a:ln>
+            <a:noFill/>
           </a:ln>
         </p:spPr>
       </p:sp>
@@ -3153,9 +2948,9 @@
                 <a:solidFill>
                   <a:srgbClr val="1A2E35"/>
                 </a:solidFill>
-                <a:latin typeface="Meiryo UI" pitchFamily="34" charset="0"/>
-                <a:ea typeface="Meiryo UI" pitchFamily="34" charset="-122"/>
-                <a:cs typeface="Meiryo UI" pitchFamily="34" charset="-120"/>
+                <a:latin typeface="Meiryo" pitchFamily="34" charset="0"/>
+                <a:ea typeface="Meiryo" pitchFamily="34" charset="-122"/>
+                <a:cs typeface="Meiryo" pitchFamily="34" charset="-120"/>
               </a:rPr>
               <a:t>導入効果・KPI</a:t>
             </a:r>
@@ -3192,9 +2987,9 @@
                 <a:solidFill>
                   <a:srgbClr val="7B9BA6"/>
                 </a:solidFill>
-                <a:latin typeface="Meiryo UI" pitchFamily="34" charset="0"/>
-                <a:ea typeface="Meiryo UI" pitchFamily="34" charset="-122"/>
-                <a:cs typeface="Meiryo UI" pitchFamily="34" charset="-120"/>
+                <a:latin typeface="Meiryo" pitchFamily="34" charset="0"/>
+                <a:ea typeface="Meiryo" pitchFamily="34" charset="-122"/>
+                <a:cs typeface="Meiryo" pitchFamily="34" charset="-120"/>
               </a:rPr>
               <a:t>定量的な成果指標と試算根拠</a:t>
             </a:r>
@@ -3258,9 +3053,9 @@
                 <a:solidFill>
                   <a:srgbClr val="0098BB"/>
                 </a:solidFill>
-                <a:latin typeface="Meiryo UI" pitchFamily="34" charset="0"/>
-                <a:ea typeface="Meiryo UI" pitchFamily="34" charset="-122"/>
-                <a:cs typeface="Meiryo UI" pitchFamily="34" charset="-120"/>
+                <a:latin typeface="Meiryo" pitchFamily="34" charset="0"/>
+                <a:ea typeface="Meiryo" pitchFamily="34" charset="-122"/>
+                <a:cs typeface="Meiryo" pitchFamily="34" charset="-120"/>
               </a:rPr>
               <a:t>05</a:t>
             </a:r>
@@ -3283,13 +3078,10 @@
             <a:avLst/>
           </a:prstGeom>
           <a:solidFill>
-            <a:srgbClr val="F0A000"/>
-          </a:solidFill>
-          <a:ln w="12700">
-            <a:solidFill>
-              <a:srgbClr val="333333"/>
-            </a:solidFill>
-            <a:prstDash val="solid"/>
+            <a:srgbClr val="0098BB"/>
+          </a:solidFill>
+          <a:ln>
+            <a:noFill/>
           </a:ln>
         </p:spPr>
       </p:sp>
@@ -3322,9 +3114,9 @@
                 <a:solidFill>
                   <a:srgbClr val="1A2E35"/>
                 </a:solidFill>
-                <a:latin typeface="Meiryo UI" pitchFamily="34" charset="0"/>
-                <a:ea typeface="Meiryo UI" pitchFamily="34" charset="-122"/>
-                <a:cs typeface="Meiryo UI" pitchFamily="34" charset="-120"/>
+                <a:latin typeface="Meiryo" pitchFamily="34" charset="0"/>
+                <a:ea typeface="Meiryo" pitchFamily="34" charset="-122"/>
+                <a:cs typeface="Meiryo" pitchFamily="34" charset="-120"/>
               </a:rPr>
               <a:t>導入ステップ・スケジュール</a:t>
             </a:r>
@@ -3361,9 +3153,9 @@
                 <a:solidFill>
                   <a:srgbClr val="7B9BA6"/>
                 </a:solidFill>
-                <a:latin typeface="Meiryo UI" pitchFamily="34" charset="0"/>
-                <a:ea typeface="Meiryo UI" pitchFamily="34" charset="-122"/>
-                <a:cs typeface="Meiryo UI" pitchFamily="34" charset="-120"/>
+                <a:latin typeface="Meiryo" pitchFamily="34" charset="0"/>
+                <a:ea typeface="Meiryo" pitchFamily="34" charset="-122"/>
+                <a:cs typeface="Meiryo" pitchFamily="34" charset="-120"/>
               </a:rPr>
               <a:t>実行計画とマイルストーン</a:t>
             </a:r>
@@ -3427,9 +3219,9 @@
                 <a:solidFill>
                   <a:srgbClr val="0098BB"/>
                 </a:solidFill>
-                <a:latin typeface="Meiryo UI" pitchFamily="34" charset="0"/>
-                <a:ea typeface="Meiryo UI" pitchFamily="34" charset="-122"/>
-                <a:cs typeface="Meiryo UI" pitchFamily="34" charset="-120"/>
+                <a:latin typeface="Meiryo" pitchFamily="34" charset="0"/>
+                <a:ea typeface="Meiryo" pitchFamily="34" charset="-122"/>
+                <a:cs typeface="Meiryo" pitchFamily="34" charset="-120"/>
               </a:rPr>
               <a:t>06</a:t>
             </a:r>
@@ -3452,13 +3244,10 @@
             <a:avLst/>
           </a:prstGeom>
           <a:solidFill>
-            <a:srgbClr val="F0A000"/>
-          </a:solidFill>
-          <a:ln w="12700">
-            <a:solidFill>
-              <a:srgbClr val="333333"/>
-            </a:solidFill>
-            <a:prstDash val="solid"/>
+            <a:srgbClr val="0098BB"/>
+          </a:solidFill>
+          <a:ln>
+            <a:noFill/>
           </a:ln>
         </p:spPr>
       </p:sp>
@@ -3491,9 +3280,9 @@
                 <a:solidFill>
                   <a:srgbClr val="1A2E35"/>
                 </a:solidFill>
-                <a:latin typeface="Meiryo UI" pitchFamily="34" charset="0"/>
-                <a:ea typeface="Meiryo UI" pitchFamily="34" charset="-122"/>
-                <a:cs typeface="Meiryo UI" pitchFamily="34" charset="-120"/>
+                <a:latin typeface="Meiryo" pitchFamily="34" charset="0"/>
+                <a:ea typeface="Meiryo" pitchFamily="34" charset="-122"/>
+                <a:cs typeface="Meiryo" pitchFamily="34" charset="-120"/>
               </a:rPr>
               <a:t>お見積り</a:t>
             </a:r>
@@ -3530,9 +3319,9 @@
                 <a:solidFill>
                   <a:srgbClr val="7B9BA6"/>
                 </a:solidFill>
-                <a:latin typeface="Meiryo UI" pitchFamily="34" charset="0"/>
-                <a:ea typeface="Meiryo UI" pitchFamily="34" charset="-122"/>
-                <a:cs typeface="Meiryo UI" pitchFamily="34" charset="-120"/>
+                <a:latin typeface="Meiryo" pitchFamily="34" charset="0"/>
+                <a:ea typeface="Meiryo" pitchFamily="34" charset="-122"/>
+                <a:cs typeface="Meiryo" pitchFamily="34" charset="-120"/>
               </a:rPr>
               <a:t>投資内訳と価格の妥当性</a:t>
             </a:r>
@@ -3596,9 +3385,9 @@
                 <a:solidFill>
                   <a:srgbClr val="0098BB"/>
                 </a:solidFill>
-                <a:latin typeface="Meiryo UI" pitchFamily="34" charset="0"/>
-                <a:ea typeface="Meiryo UI" pitchFamily="34" charset="-122"/>
-                <a:cs typeface="Meiryo UI" pitchFamily="34" charset="-120"/>
+                <a:latin typeface="Meiryo" pitchFamily="34" charset="0"/>
+                <a:ea typeface="Meiryo" pitchFamily="34" charset="-122"/>
+                <a:cs typeface="Meiryo" pitchFamily="34" charset="-120"/>
               </a:rPr>
               <a:t>07</a:t>
             </a:r>
@@ -3621,13 +3410,10 @@
             <a:avLst/>
           </a:prstGeom>
           <a:solidFill>
-            <a:srgbClr val="F0A000"/>
-          </a:solidFill>
-          <a:ln w="12700">
-            <a:solidFill>
-              <a:srgbClr val="333333"/>
-            </a:solidFill>
-            <a:prstDash val="solid"/>
+            <a:srgbClr val="0098BB"/>
+          </a:solidFill>
+          <a:ln>
+            <a:noFill/>
           </a:ln>
         </p:spPr>
       </p:sp>
@@ -3660,9 +3446,9 @@
                 <a:solidFill>
                   <a:srgbClr val="1A2E35"/>
                 </a:solidFill>
-                <a:latin typeface="Meiryo UI" pitchFamily="34" charset="0"/>
-                <a:ea typeface="Meiryo UI" pitchFamily="34" charset="-122"/>
-                <a:cs typeface="Meiryo UI" pitchFamily="34" charset="-120"/>
+                <a:latin typeface="Meiryo" pitchFamily="34" charset="0"/>
+                <a:ea typeface="Meiryo" pitchFamily="34" charset="-122"/>
+                <a:cs typeface="Meiryo" pitchFamily="34" charset="-120"/>
               </a:rPr>
               <a:t>次のアクション</a:t>
             </a:r>
@@ -3699,9 +3485,9 @@
                 <a:solidFill>
                   <a:srgbClr val="7B9BA6"/>
                 </a:solidFill>
-                <a:latin typeface="Meiryo UI" pitchFamily="34" charset="0"/>
-                <a:ea typeface="Meiryo UI" pitchFamily="34" charset="-122"/>
-                <a:cs typeface="Meiryo UI" pitchFamily="34" charset="-120"/>
+                <a:latin typeface="Meiryo" pitchFamily="34" charset="0"/>
+                <a:ea typeface="Meiryo" pitchFamily="34" charset="-122"/>
+                <a:cs typeface="Meiryo" pitchFamily="34" charset="-120"/>
               </a:rPr>
               <a:t>合意事項と意思決定フロー</a:t>
             </a:r>
@@ -3751,11 +3537,8 @@
           <a:solidFill>
             <a:srgbClr val="F4FBFD"/>
           </a:solidFill>
-          <a:ln w="12700">
-            <a:solidFill>
-              <a:srgbClr val="333333"/>
-            </a:solidFill>
-            <a:prstDash val="solid"/>
+          <a:ln>
+            <a:noFill/>
           </a:ln>
         </p:spPr>
       </p:sp>
@@ -3776,11 +3559,8 @@
           <a:solidFill>
             <a:srgbClr val="006F8A"/>
           </a:solidFill>
-          <a:ln w="12700">
-            <a:solidFill>
-              <a:srgbClr val="333333"/>
-            </a:solidFill>
-            <a:prstDash val="solid"/>
+          <a:ln>
+            <a:noFill/>
           </a:ln>
         </p:spPr>
       </p:sp>
@@ -3799,13 +3579,10 @@
             <a:avLst/>
           </a:prstGeom>
           <a:solidFill>
-            <a:srgbClr val="F0A000"/>
-          </a:solidFill>
-          <a:ln w="12700">
-            <a:solidFill>
-              <a:srgbClr val="333333"/>
-            </a:solidFill>
-            <a:prstDash val="solid"/>
+            <a:srgbClr val="0098BB"/>
+          </a:solidFill>
+          <a:ln>
+            <a:noFill/>
           </a:ln>
         </p:spPr>
       </p:sp>
@@ -3838,9 +3615,9 @@
                 <a:solidFill>
                   <a:srgbClr val="FFFFFF"/>
                 </a:solidFill>
-                <a:latin typeface="Meiryo UI" pitchFamily="34" charset="0"/>
-                <a:ea typeface="Meiryo UI" pitchFamily="34" charset="-122"/>
-                <a:cs typeface="Meiryo UI" pitchFamily="34" charset="-120"/>
+                <a:latin typeface="Meiryo" pitchFamily="34" charset="0"/>
+                <a:ea typeface="Meiryo" pitchFamily="34" charset="-122"/>
+                <a:cs typeface="Meiryo" pitchFamily="34" charset="-120"/>
               </a:rPr>
               <a:t>01   現状と課題</a:t>
             </a:r>
@@ -3865,11 +3642,8 @@
           <a:solidFill>
             <a:srgbClr val="006F8A"/>
           </a:solidFill>
-          <a:ln w="12700">
-            <a:solidFill>
-              <a:srgbClr val="333333"/>
-            </a:solidFill>
-            <a:prstDash val="solid"/>
+          <a:ln>
+            <a:noFill/>
           </a:ln>
         </p:spPr>
       </p:sp>
@@ -3902,9 +3676,9 @@
                 <a:solidFill>
                   <a:srgbClr val="AADDE8"/>
                 </a:solidFill>
-                <a:latin typeface="Meiryo UI" pitchFamily="34" charset="0"/>
-                <a:ea typeface="Meiryo UI" pitchFamily="34" charset="-122"/>
-                <a:cs typeface="Meiryo UI" pitchFamily="34" charset="-120"/>
+                <a:latin typeface="Meiryo" pitchFamily="34" charset="0"/>
+                <a:ea typeface="Meiryo" pitchFamily="34" charset="-122"/>
+                <a:cs typeface="Meiryo" pitchFamily="34" charset="-120"/>
               </a:rPr>
               <a:t>Novagrid</a:t>
             </a:r>
@@ -3941,9 +3715,9 @@
                 <a:solidFill>
                   <a:srgbClr val="AADDE8"/>
                 </a:solidFill>
-                <a:latin typeface="Meiryo UI" pitchFamily="34" charset="0"/>
-                <a:ea typeface="Meiryo UI" pitchFamily="34" charset="-122"/>
-                <a:cs typeface="Meiryo UI" pitchFamily="34" charset="-120"/>
+                <a:latin typeface="Meiryo" pitchFamily="34" charset="0"/>
+                <a:ea typeface="Meiryo" pitchFamily="34" charset="-122"/>
+                <a:cs typeface="Meiryo" pitchFamily="34" charset="-120"/>
               </a:rPr>
               <a:t>3 / 9</a:t>
             </a:r>
@@ -3980,9 +3754,9 @@
                 <a:solidFill>
                   <a:srgbClr val="2C4A52"/>
                 </a:solidFill>
-                <a:latin typeface="Meiryo UI" pitchFamily="34" charset="0"/>
-                <a:ea typeface="Meiryo UI" pitchFamily="34" charset="-122"/>
-                <a:cs typeface="Meiryo UI" pitchFamily="34" charset="-120"/>
+                <a:latin typeface="Meiryo" pitchFamily="34" charset="0"/>
+                <a:ea typeface="Meiryo" pitchFamily="34" charset="-122"/>
+                <a:cs typeface="Meiryo" pitchFamily="34" charset="-120"/>
               </a:rPr>
               <a:t>{{CLIENT_NAME}}様が抱える3つの重要課題</a:t>
             </a:r>
@@ -4030,13 +3804,10 @@
             <a:avLst/>
           </a:prstGeom>
           <a:solidFill>
-            <a:srgbClr val="E74C3C"/>
-          </a:solidFill>
-          <a:ln w="12700">
-            <a:solidFill>
-              <a:srgbClr val="333333"/>
-            </a:solidFill>
-            <a:prstDash val="solid"/>
+            <a:srgbClr val="0098BB"/>
+          </a:solidFill>
+          <a:ln>
+            <a:noFill/>
           </a:ln>
         </p:spPr>
       </p:sp>
@@ -4067,11 +3838,11 @@
             <a:r>
               <a:rPr lang="en-US" sz="1100" b="1" dirty="0">
                 <a:solidFill>
-                  <a:srgbClr val="E74C3C"/>
-                </a:solidFill>
-                <a:latin typeface="Meiryo UI" pitchFamily="34" charset="0"/>
-                <a:ea typeface="Meiryo UI" pitchFamily="34" charset="-122"/>
-                <a:cs typeface="Meiryo UI" pitchFamily="34" charset="-120"/>
+                  <a:srgbClr val="0098BB"/>
+                </a:solidFill>
+                <a:latin typeface="Meiryo" pitchFamily="34" charset="0"/>
+                <a:ea typeface="Meiryo" pitchFamily="34" charset="-122"/>
+                <a:cs typeface="Meiryo" pitchFamily="34" charset="-120"/>
               </a:rPr>
               <a:t>課題 ①</a:t>
             </a:r>
@@ -4111,9 +3882,9 @@
                 <a:solidFill>
                   <a:srgbClr val="1A2E35"/>
                 </a:solidFill>
-                <a:latin typeface="Meiryo UI" pitchFamily="34" charset="0"/>
-                <a:ea typeface="Meiryo UI" pitchFamily="34" charset="-122"/>
-                <a:cs typeface="Meiryo UI" pitchFamily="34" charset="-120"/>
+                <a:latin typeface="Meiryo" pitchFamily="34" charset="0"/>
+                <a:ea typeface="Meiryo" pitchFamily="34" charset="-122"/>
+                <a:cs typeface="Meiryo" pitchFamily="34" charset="-120"/>
               </a:rPr>
               <a:t>{{CHALLENGE_1}}</a:t>
             </a:r>
@@ -4161,13 +3932,10 @@
             <a:avLst/>
           </a:prstGeom>
           <a:solidFill>
-            <a:srgbClr val="E67E22"/>
-          </a:solidFill>
-          <a:ln w="12700">
-            <a:solidFill>
-              <a:srgbClr val="333333"/>
-            </a:solidFill>
-            <a:prstDash val="solid"/>
+            <a:srgbClr val="0098BB"/>
+          </a:solidFill>
+          <a:ln>
+            <a:noFill/>
           </a:ln>
         </p:spPr>
       </p:sp>
@@ -4198,11 +3966,11 @@
             <a:r>
               <a:rPr lang="en-US" sz="1100" b="1" dirty="0">
                 <a:solidFill>
-                  <a:srgbClr val="E67E22"/>
-                </a:solidFill>
-                <a:latin typeface="Meiryo UI" pitchFamily="34" charset="0"/>
-                <a:ea typeface="Meiryo UI" pitchFamily="34" charset="-122"/>
-                <a:cs typeface="Meiryo UI" pitchFamily="34" charset="-120"/>
+                  <a:srgbClr val="0098BB"/>
+                </a:solidFill>
+                <a:latin typeface="Meiryo" pitchFamily="34" charset="0"/>
+                <a:ea typeface="Meiryo" pitchFamily="34" charset="-122"/>
+                <a:cs typeface="Meiryo" pitchFamily="34" charset="-120"/>
               </a:rPr>
               <a:t>課題 ②</a:t>
             </a:r>
@@ -4242,9 +4010,9 @@
                 <a:solidFill>
                   <a:srgbClr val="1A2E35"/>
                 </a:solidFill>
-                <a:latin typeface="Meiryo UI" pitchFamily="34" charset="0"/>
-                <a:ea typeface="Meiryo UI" pitchFamily="34" charset="-122"/>
-                <a:cs typeface="Meiryo UI" pitchFamily="34" charset="-120"/>
+                <a:latin typeface="Meiryo" pitchFamily="34" charset="0"/>
+                <a:ea typeface="Meiryo" pitchFamily="34" charset="-122"/>
+                <a:cs typeface="Meiryo" pitchFamily="34" charset="-120"/>
               </a:rPr>
               <a:t>{{CHALLENGE_2}}</a:t>
             </a:r>
@@ -4294,11 +4062,8 @@
           <a:solidFill>
             <a:srgbClr val="006F8A"/>
           </a:solidFill>
-          <a:ln w="12700">
-            <a:solidFill>
-              <a:srgbClr val="333333"/>
-            </a:solidFill>
-            <a:prstDash val="solid"/>
+          <a:ln>
+            <a:noFill/>
           </a:ln>
         </p:spPr>
       </p:sp>
@@ -4331,9 +4096,9 @@
                 <a:solidFill>
                   <a:srgbClr val="006F8A"/>
                 </a:solidFill>
-                <a:latin typeface="Meiryo UI" pitchFamily="34" charset="0"/>
-                <a:ea typeface="Meiryo UI" pitchFamily="34" charset="-122"/>
-                <a:cs typeface="Meiryo UI" pitchFamily="34" charset="-120"/>
+                <a:latin typeface="Meiryo" pitchFamily="34" charset="0"/>
+                <a:ea typeface="Meiryo" pitchFamily="34" charset="-122"/>
+                <a:cs typeface="Meiryo" pitchFamily="34" charset="-120"/>
               </a:rPr>
               <a:t>課題 ③</a:t>
             </a:r>
@@ -4373,9 +4138,9 @@
                 <a:solidFill>
                   <a:srgbClr val="1A2E35"/>
                 </a:solidFill>
-                <a:latin typeface="Meiryo UI" pitchFamily="34" charset="0"/>
-                <a:ea typeface="Meiryo UI" pitchFamily="34" charset="-122"/>
-                <a:cs typeface="Meiryo UI" pitchFamily="34" charset="-120"/>
+                <a:latin typeface="Meiryo" pitchFamily="34" charset="0"/>
+                <a:ea typeface="Meiryo" pitchFamily="34" charset="-122"/>
+                <a:cs typeface="Meiryo" pitchFamily="34" charset="-120"/>
               </a:rPr>
               <a:t>{{CHALLENGE_3}}</a:t>
             </a:r>
@@ -4425,11 +4190,8 @@
           <a:solidFill>
             <a:srgbClr val="F4FBFD"/>
           </a:solidFill>
-          <a:ln w="12700">
-            <a:solidFill>
-              <a:srgbClr val="333333"/>
-            </a:solidFill>
-            <a:prstDash val="solid"/>
+          <a:ln>
+            <a:noFill/>
           </a:ln>
         </p:spPr>
       </p:sp>
@@ -4450,11 +4212,8 @@
           <a:solidFill>
             <a:srgbClr val="006F8A"/>
           </a:solidFill>
-          <a:ln w="12700">
-            <a:solidFill>
-              <a:srgbClr val="333333"/>
-            </a:solidFill>
-            <a:prstDash val="solid"/>
+          <a:ln>
+            <a:noFill/>
           </a:ln>
         </p:spPr>
       </p:sp>
@@ -4473,13 +4232,10 @@
             <a:avLst/>
           </a:prstGeom>
           <a:solidFill>
-            <a:srgbClr val="F0A000"/>
-          </a:solidFill>
-          <a:ln w="12700">
-            <a:solidFill>
-              <a:srgbClr val="333333"/>
-            </a:solidFill>
-            <a:prstDash val="solid"/>
+            <a:srgbClr val="0098BB"/>
+          </a:solidFill>
+          <a:ln>
+            <a:noFill/>
           </a:ln>
         </p:spPr>
       </p:sp>
@@ -4512,9 +4268,9 @@
                 <a:solidFill>
                   <a:srgbClr val="FFFFFF"/>
                 </a:solidFill>
-                <a:latin typeface="Meiryo UI" pitchFamily="34" charset="0"/>
-                <a:ea typeface="Meiryo UI" pitchFamily="34" charset="-122"/>
-                <a:cs typeface="Meiryo UI" pitchFamily="34" charset="-120"/>
+                <a:latin typeface="Meiryo" pitchFamily="34" charset="0"/>
+                <a:ea typeface="Meiryo" pitchFamily="34" charset="-122"/>
+                <a:cs typeface="Meiryo" pitchFamily="34" charset="-120"/>
               </a:rPr>
               <a:t>02   ご提案の概要</a:t>
             </a:r>
@@ -4539,11 +4295,8 @@
           <a:solidFill>
             <a:srgbClr val="006F8A"/>
           </a:solidFill>
-          <a:ln w="12700">
-            <a:solidFill>
-              <a:srgbClr val="333333"/>
-            </a:solidFill>
-            <a:prstDash val="solid"/>
+          <a:ln>
+            <a:noFill/>
           </a:ln>
         </p:spPr>
       </p:sp>
@@ -4576,9 +4329,9 @@
                 <a:solidFill>
                   <a:srgbClr val="AADDE8"/>
                 </a:solidFill>
-                <a:latin typeface="Meiryo UI" pitchFamily="34" charset="0"/>
-                <a:ea typeface="Meiryo UI" pitchFamily="34" charset="-122"/>
-                <a:cs typeface="Meiryo UI" pitchFamily="34" charset="-120"/>
+                <a:latin typeface="Meiryo" pitchFamily="34" charset="0"/>
+                <a:ea typeface="Meiryo" pitchFamily="34" charset="-122"/>
+                <a:cs typeface="Meiryo" pitchFamily="34" charset="-120"/>
               </a:rPr>
               <a:t>Novagrid</a:t>
             </a:r>
@@ -4615,9 +4368,9 @@
                 <a:solidFill>
                   <a:srgbClr val="AADDE8"/>
                 </a:solidFill>
-                <a:latin typeface="Meiryo UI" pitchFamily="34" charset="0"/>
-                <a:ea typeface="Meiryo UI" pitchFamily="34" charset="-122"/>
-                <a:cs typeface="Meiryo UI" pitchFamily="34" charset="-120"/>
+                <a:latin typeface="Meiryo" pitchFamily="34" charset="0"/>
+                <a:ea typeface="Meiryo" pitchFamily="34" charset="-122"/>
+                <a:cs typeface="Meiryo" pitchFamily="34" charset="-120"/>
               </a:rPr>
               <a:t>4 / 9</a:t>
             </a:r>
@@ -4642,11 +4395,8 @@
           <a:solidFill>
             <a:srgbClr val="006F8A"/>
           </a:solidFill>
-          <a:ln w="12700">
-            <a:solidFill>
-              <a:srgbClr val="333333"/>
-            </a:solidFill>
-            <a:prstDash val="solid"/>
+          <a:ln>
+            <a:noFill/>
           </a:ln>
         </p:spPr>
       </p:sp>
@@ -4665,13 +4415,10 @@
             <a:avLst/>
           </a:prstGeom>
           <a:solidFill>
-            <a:srgbClr val="F0A000"/>
-          </a:solidFill>
-          <a:ln w="12700">
-            <a:solidFill>
-              <a:srgbClr val="333333"/>
-            </a:solidFill>
-            <a:prstDash val="solid"/>
+            <a:srgbClr val="0098BB"/>
+          </a:solidFill>
+          <a:ln>
+            <a:noFill/>
           </a:ln>
         </p:spPr>
       </p:sp>
@@ -4707,9 +4454,9 @@
                 <a:solidFill>
                   <a:srgbClr val="FFFFFF"/>
                 </a:solidFill>
-                <a:latin typeface="Meiryo UI" pitchFamily="34" charset="0"/>
-                <a:ea typeface="Meiryo UI" pitchFamily="34" charset="-122"/>
-                <a:cs typeface="Meiryo UI" pitchFamily="34" charset="-120"/>
+                <a:latin typeface="Meiryo" pitchFamily="34" charset="0"/>
+                <a:ea typeface="Meiryo" pitchFamily="34" charset="-122"/>
+                <a:cs typeface="Meiryo" pitchFamily="34" charset="-120"/>
               </a:rPr>
               <a:t>{{PROPOSAL_SUMMARY}}</a:t>
             </a:r>
@@ -4746,9 +4493,9 @@
                 <a:solidFill>
                   <a:srgbClr val="006F8A"/>
                 </a:solidFill>
-                <a:latin typeface="Meiryo UI" pitchFamily="34" charset="0"/>
-                <a:ea typeface="Meiryo UI" pitchFamily="34" charset="-122"/>
-                <a:cs typeface="Meiryo UI" pitchFamily="34" charset="-120"/>
+                <a:latin typeface="Meiryo" pitchFamily="34" charset="0"/>
+                <a:ea typeface="Meiryo" pitchFamily="34" charset="-122"/>
+                <a:cs typeface="Meiryo" pitchFamily="34" charset="-120"/>
               </a:rPr>
               <a:t>選ばれる 3 つの理由</a:t>
             </a:r>
@@ -4798,13 +4545,10 @@
             <a:avLst/>
           </a:prstGeom>
           <a:solidFill>
-            <a:srgbClr val="F0A000"/>
-          </a:solidFill>
-          <a:ln w="12700">
-            <a:solidFill>
-              <a:srgbClr val="333333"/>
-            </a:solidFill>
-            <a:prstDash val="solid"/>
+            <a:srgbClr val="0098BB"/>
+          </a:solidFill>
+          <a:ln>
+            <a:noFill/>
           </a:ln>
         </p:spPr>
       </p:sp>
@@ -4837,9 +4581,9 @@
                 <a:solidFill>
                   <a:srgbClr val="000000"/>
                 </a:solidFill>
-                <a:latin typeface="Meiryo UI" pitchFamily="34" charset="0"/>
-                <a:ea typeface="Meiryo UI" pitchFamily="34" charset="-122"/>
-                <a:cs typeface="Meiryo UI" pitchFamily="34" charset="-120"/>
+                <a:latin typeface="Meiryo" pitchFamily="34" charset="0"/>
+                <a:ea typeface="Meiryo" pitchFamily="34" charset="-122"/>
+                <a:cs typeface="Meiryo" pitchFamily="34" charset="-120"/>
               </a:rPr>
               <a:t>★</a:t>
             </a:r>
@@ -4874,11 +4618,11 @@
             <a:r>
               <a:rPr lang="en-US" sz="950" b="1" dirty="0">
                 <a:solidFill>
-                  <a:srgbClr val="F0A000"/>
-                </a:solidFill>
-                <a:latin typeface="Meiryo UI" pitchFamily="34" charset="0"/>
-                <a:ea typeface="Meiryo UI" pitchFamily="34" charset="-122"/>
-                <a:cs typeface="Meiryo UI" pitchFamily="34" charset="-120"/>
+                  <a:srgbClr val="0098BB"/>
+                </a:solidFill>
+                <a:latin typeface="Meiryo" pitchFamily="34" charset="0"/>
+                <a:ea typeface="Meiryo" pitchFamily="34" charset="-122"/>
+                <a:cs typeface="Meiryo" pitchFamily="34" charset="-120"/>
               </a:rPr>
               <a:t>差別化ポイント</a:t>
             </a:r>
@@ -4918,9 +4662,9 @@
                 <a:solidFill>
                   <a:srgbClr val="1A2E35"/>
                 </a:solidFill>
-                <a:latin typeface="Meiryo UI" pitchFamily="34" charset="0"/>
-                <a:ea typeface="Meiryo UI" pitchFamily="34" charset="-122"/>
-                <a:cs typeface="Meiryo UI" pitchFamily="34" charset="-120"/>
+                <a:latin typeface="Meiryo" pitchFamily="34" charset="0"/>
+                <a:ea typeface="Meiryo" pitchFamily="34" charset="-122"/>
+                <a:cs typeface="Meiryo" pitchFamily="34" charset="-120"/>
               </a:rPr>
               <a:t>{{KEY_POINT_1}}</a:t>
             </a:r>
@@ -4970,13 +4714,10 @@
             <a:avLst/>
           </a:prstGeom>
           <a:solidFill>
-            <a:srgbClr val="2ECC71"/>
-          </a:solidFill>
-          <a:ln w="12700">
-            <a:solidFill>
-              <a:srgbClr val="333333"/>
-            </a:solidFill>
-            <a:prstDash val="solid"/>
+            <a:srgbClr val="0098BB"/>
+          </a:solidFill>
+          <a:ln>
+            <a:noFill/>
           </a:ln>
         </p:spPr>
       </p:sp>
@@ -5009,9 +4750,9 @@
                 <a:solidFill>
                   <a:srgbClr val="000000"/>
                 </a:solidFill>
-                <a:latin typeface="Meiryo UI" pitchFamily="34" charset="0"/>
-                <a:ea typeface="Meiryo UI" pitchFamily="34" charset="-122"/>
-                <a:cs typeface="Meiryo UI" pitchFamily="34" charset="-120"/>
+                <a:latin typeface="Meiryo" pitchFamily="34" charset="0"/>
+                <a:ea typeface="Meiryo" pitchFamily="34" charset="-122"/>
+                <a:cs typeface="Meiryo" pitchFamily="34" charset="-120"/>
               </a:rPr>
               <a:t>📈</a:t>
             </a:r>
@@ -5046,11 +4787,11 @@
             <a:r>
               <a:rPr lang="en-US" sz="950" b="1" dirty="0">
                 <a:solidFill>
-                  <a:srgbClr val="2ECC71"/>
-                </a:solidFill>
-                <a:latin typeface="Meiryo UI" pitchFamily="34" charset="0"/>
-                <a:ea typeface="Meiryo UI" pitchFamily="34" charset="-122"/>
-                <a:cs typeface="Meiryo UI" pitchFamily="34" charset="-120"/>
+                  <a:srgbClr val="0098BB"/>
+                </a:solidFill>
+                <a:latin typeface="Meiryo" pitchFamily="34" charset="0"/>
+                <a:ea typeface="Meiryo" pitchFamily="34" charset="-122"/>
+                <a:cs typeface="Meiryo" pitchFamily="34" charset="-120"/>
               </a:rPr>
               <a:t>定量効果・ROI</a:t>
             </a:r>
@@ -5090,9 +4831,9 @@
                 <a:solidFill>
                   <a:srgbClr val="1A2E35"/>
                 </a:solidFill>
-                <a:latin typeface="Meiryo UI" pitchFamily="34" charset="0"/>
-                <a:ea typeface="Meiryo UI" pitchFamily="34" charset="-122"/>
-                <a:cs typeface="Meiryo UI" pitchFamily="34" charset="-120"/>
+                <a:latin typeface="Meiryo" pitchFamily="34" charset="0"/>
+                <a:ea typeface="Meiryo" pitchFamily="34" charset="-122"/>
+                <a:cs typeface="Meiryo" pitchFamily="34" charset="-120"/>
               </a:rPr>
               <a:t>{{KEY_POINT_2}}</a:t>
             </a:r>
@@ -5144,11 +4885,8 @@
           <a:solidFill>
             <a:srgbClr val="0098BB"/>
           </a:solidFill>
-          <a:ln w="12700">
-            <a:solidFill>
-              <a:srgbClr val="333333"/>
-            </a:solidFill>
-            <a:prstDash val="solid"/>
+          <a:ln>
+            <a:noFill/>
           </a:ln>
         </p:spPr>
       </p:sp>
@@ -5181,9 +4919,9 @@
                 <a:solidFill>
                   <a:srgbClr val="000000"/>
                 </a:solidFill>
-                <a:latin typeface="Meiryo UI" pitchFamily="34" charset="0"/>
-                <a:ea typeface="Meiryo UI" pitchFamily="34" charset="-122"/>
-                <a:cs typeface="Meiryo UI" pitchFamily="34" charset="-120"/>
+                <a:latin typeface="Meiryo" pitchFamily="34" charset="0"/>
+                <a:ea typeface="Meiryo" pitchFamily="34" charset="-122"/>
+                <a:cs typeface="Meiryo" pitchFamily="34" charset="-120"/>
               </a:rPr>
               <a:t>🛡</a:t>
             </a:r>
@@ -5220,9 +4958,9 @@
                 <a:solidFill>
                   <a:srgbClr val="0098BB"/>
                 </a:solidFill>
-                <a:latin typeface="Meiryo UI" pitchFamily="34" charset="0"/>
-                <a:ea typeface="Meiryo UI" pitchFamily="34" charset="-122"/>
-                <a:cs typeface="Meiryo UI" pitchFamily="34" charset="-120"/>
+                <a:latin typeface="Meiryo" pitchFamily="34" charset="0"/>
+                <a:ea typeface="Meiryo" pitchFamily="34" charset="-122"/>
+                <a:cs typeface="Meiryo" pitchFamily="34" charset="-120"/>
               </a:rPr>
               <a:t>リスク低減</a:t>
             </a:r>
@@ -5262,9 +5000,9 @@
                 <a:solidFill>
                   <a:srgbClr val="1A2E35"/>
                 </a:solidFill>
-                <a:latin typeface="Meiryo UI" pitchFamily="34" charset="0"/>
-                <a:ea typeface="Meiryo UI" pitchFamily="34" charset="-122"/>
-                <a:cs typeface="Meiryo UI" pitchFamily="34" charset="-120"/>
+                <a:latin typeface="Meiryo" pitchFamily="34" charset="0"/>
+                <a:ea typeface="Meiryo" pitchFamily="34" charset="-122"/>
+                <a:cs typeface="Meiryo" pitchFamily="34" charset="-120"/>
               </a:rPr>
               <a:t>{{KEY_POINT_3}}</a:t>
             </a:r>
@@ -5314,11 +5052,8 @@
           <a:solidFill>
             <a:srgbClr val="F4FBFD"/>
           </a:solidFill>
-          <a:ln w="12700">
-            <a:solidFill>
-              <a:srgbClr val="333333"/>
-            </a:solidFill>
-            <a:prstDash val="solid"/>
+          <a:ln>
+            <a:noFill/>
           </a:ln>
         </p:spPr>
       </p:sp>
@@ -5339,11 +5074,8 @@
           <a:solidFill>
             <a:srgbClr val="006F8A"/>
           </a:solidFill>
-          <a:ln w="12700">
-            <a:solidFill>
-              <a:srgbClr val="333333"/>
-            </a:solidFill>
-            <a:prstDash val="solid"/>
+          <a:ln>
+            <a:noFill/>
           </a:ln>
         </p:spPr>
       </p:sp>
@@ -5362,13 +5094,10 @@
             <a:avLst/>
           </a:prstGeom>
           <a:solidFill>
-            <a:srgbClr val="F0A000"/>
-          </a:solidFill>
-          <a:ln w="12700">
-            <a:solidFill>
-              <a:srgbClr val="333333"/>
-            </a:solidFill>
-            <a:prstDash val="solid"/>
+            <a:srgbClr val="0098BB"/>
+          </a:solidFill>
+          <a:ln>
+            <a:noFill/>
           </a:ln>
         </p:spPr>
       </p:sp>
@@ -5401,9 +5130,9 @@
                 <a:solidFill>
                   <a:srgbClr val="FFFFFF"/>
                 </a:solidFill>
-                <a:latin typeface="Meiryo UI" pitchFamily="34" charset="0"/>
-                <a:ea typeface="Meiryo UI" pitchFamily="34" charset="-122"/>
-                <a:cs typeface="Meiryo UI" pitchFamily="34" charset="-120"/>
+                <a:latin typeface="Meiryo" pitchFamily="34" charset="0"/>
+                <a:ea typeface="Meiryo" pitchFamily="34" charset="-122"/>
+                <a:cs typeface="Meiryo" pitchFamily="34" charset="-120"/>
               </a:rPr>
               <a:t>03   ソリューション詳細</a:t>
             </a:r>
@@ -5428,11 +5157,8 @@
           <a:solidFill>
             <a:srgbClr val="006F8A"/>
           </a:solidFill>
-          <a:ln w="12700">
-            <a:solidFill>
-              <a:srgbClr val="333333"/>
-            </a:solidFill>
-            <a:prstDash val="solid"/>
+          <a:ln>
+            <a:noFill/>
           </a:ln>
         </p:spPr>
       </p:sp>
@@ -5465,9 +5191,9 @@
                 <a:solidFill>
                   <a:srgbClr val="AADDE8"/>
                 </a:solidFill>
-                <a:latin typeface="Meiryo UI" pitchFamily="34" charset="0"/>
-                <a:ea typeface="Meiryo UI" pitchFamily="34" charset="-122"/>
-                <a:cs typeface="Meiryo UI" pitchFamily="34" charset="-120"/>
+                <a:latin typeface="Meiryo" pitchFamily="34" charset="0"/>
+                <a:ea typeface="Meiryo" pitchFamily="34" charset="-122"/>
+                <a:cs typeface="Meiryo" pitchFamily="34" charset="-120"/>
               </a:rPr>
               <a:t>Novagrid</a:t>
             </a:r>
@@ -5504,9 +5230,9 @@
                 <a:solidFill>
                   <a:srgbClr val="AADDE8"/>
                 </a:solidFill>
-                <a:latin typeface="Meiryo UI" pitchFamily="34" charset="0"/>
-                <a:ea typeface="Meiryo UI" pitchFamily="34" charset="-122"/>
-                <a:cs typeface="Meiryo UI" pitchFamily="34" charset="-120"/>
+                <a:latin typeface="Meiryo" pitchFamily="34" charset="0"/>
+                <a:ea typeface="Meiryo" pitchFamily="34" charset="-122"/>
+                <a:cs typeface="Meiryo" pitchFamily="34" charset="-120"/>
               </a:rPr>
               <a:t>5 / 9</a:t>
             </a:r>
@@ -5556,11 +5282,8 @@
           <a:solidFill>
             <a:srgbClr val="0098BB"/>
           </a:solidFill>
-          <a:ln w="12700">
-            <a:solidFill>
-              <a:srgbClr val="333333"/>
-            </a:solidFill>
-            <a:prstDash val="solid"/>
+          <a:ln>
+            <a:noFill/>
           </a:ln>
         </p:spPr>
       </p:sp>
@@ -5593,9 +5316,9 @@
                 <a:solidFill>
                   <a:srgbClr val="FFFFFF"/>
                 </a:solidFill>
-                <a:latin typeface="Meiryo UI" pitchFamily="34" charset="0"/>
-                <a:ea typeface="Meiryo UI" pitchFamily="34" charset="-122"/>
-                <a:cs typeface="Meiryo UI" pitchFamily="34" charset="-120"/>
+                <a:latin typeface="Meiryo" pitchFamily="34" charset="0"/>
+                <a:ea typeface="Meiryo" pitchFamily="34" charset="-122"/>
+                <a:cs typeface="Meiryo" pitchFamily="34" charset="-120"/>
               </a:rPr>
               <a:t>1</a:t>
             </a:r>
@@ -5635,9 +5358,9 @@
                 <a:solidFill>
                   <a:srgbClr val="1A2E35"/>
                 </a:solidFill>
-                <a:latin typeface="Meiryo UI" pitchFamily="34" charset="0"/>
-                <a:ea typeface="Meiryo UI" pitchFamily="34" charset="-122"/>
-                <a:cs typeface="Meiryo UI" pitchFamily="34" charset="-120"/>
+                <a:latin typeface="Meiryo" pitchFamily="34" charset="0"/>
+                <a:ea typeface="Meiryo" pitchFamily="34" charset="-122"/>
+                <a:cs typeface="Meiryo" pitchFamily="34" charset="-120"/>
               </a:rPr>
               <a:t>{{FEATURE_1}}</a:t>
             </a:r>
@@ -5687,11 +5410,8 @@
           <a:solidFill>
             <a:srgbClr val="0098BB"/>
           </a:solidFill>
-          <a:ln w="12700">
-            <a:solidFill>
-              <a:srgbClr val="333333"/>
-            </a:solidFill>
-            <a:prstDash val="solid"/>
+          <a:ln>
+            <a:noFill/>
           </a:ln>
         </p:spPr>
       </p:sp>
@@ -5724,9 +5444,9 @@
                 <a:solidFill>
                   <a:srgbClr val="FFFFFF"/>
                 </a:solidFill>
-                <a:latin typeface="Meiryo UI" pitchFamily="34" charset="0"/>
-                <a:ea typeface="Meiryo UI" pitchFamily="34" charset="-122"/>
-                <a:cs typeface="Meiryo UI" pitchFamily="34" charset="-120"/>
+                <a:latin typeface="Meiryo" pitchFamily="34" charset="0"/>
+                <a:ea typeface="Meiryo" pitchFamily="34" charset="-122"/>
+                <a:cs typeface="Meiryo" pitchFamily="34" charset="-120"/>
               </a:rPr>
               <a:t>2</a:t>
             </a:r>
@@ -5766,9 +5486,9 @@
                 <a:solidFill>
                   <a:srgbClr val="1A2E35"/>
                 </a:solidFill>
-                <a:latin typeface="Meiryo UI" pitchFamily="34" charset="0"/>
-                <a:ea typeface="Meiryo UI" pitchFamily="34" charset="-122"/>
-                <a:cs typeface="Meiryo UI" pitchFamily="34" charset="-120"/>
+                <a:latin typeface="Meiryo" pitchFamily="34" charset="0"/>
+                <a:ea typeface="Meiryo" pitchFamily="34" charset="-122"/>
+                <a:cs typeface="Meiryo" pitchFamily="34" charset="-120"/>
               </a:rPr>
               <a:t>{{FEATURE_2}}</a:t>
             </a:r>
@@ -5818,11 +5538,8 @@
           <a:solidFill>
             <a:srgbClr val="0098BB"/>
           </a:solidFill>
-          <a:ln w="12700">
-            <a:solidFill>
-              <a:srgbClr val="333333"/>
-            </a:solidFill>
-            <a:prstDash val="solid"/>
+          <a:ln>
+            <a:noFill/>
           </a:ln>
         </p:spPr>
       </p:sp>
@@ -5855,9 +5572,9 @@
                 <a:solidFill>
                   <a:srgbClr val="FFFFFF"/>
                 </a:solidFill>
-                <a:latin typeface="Meiryo UI" pitchFamily="34" charset="0"/>
-                <a:ea typeface="Meiryo UI" pitchFamily="34" charset="-122"/>
-                <a:cs typeface="Meiryo UI" pitchFamily="34" charset="-120"/>
+                <a:latin typeface="Meiryo" pitchFamily="34" charset="0"/>
+                <a:ea typeface="Meiryo" pitchFamily="34" charset="-122"/>
+                <a:cs typeface="Meiryo" pitchFamily="34" charset="-120"/>
               </a:rPr>
               <a:t>3</a:t>
             </a:r>
@@ -5897,9 +5614,9 @@
                 <a:solidFill>
                   <a:srgbClr val="1A2E35"/>
                 </a:solidFill>
-                <a:latin typeface="Meiryo UI" pitchFamily="34" charset="0"/>
-                <a:ea typeface="Meiryo UI" pitchFamily="34" charset="-122"/>
-                <a:cs typeface="Meiryo UI" pitchFamily="34" charset="-120"/>
+                <a:latin typeface="Meiryo" pitchFamily="34" charset="0"/>
+                <a:ea typeface="Meiryo" pitchFamily="34" charset="-122"/>
+                <a:cs typeface="Meiryo" pitchFamily="34" charset="-120"/>
               </a:rPr>
               <a:t>{{FEATURE_3}}</a:t>
             </a:r>
@@ -5949,11 +5666,8 @@
           <a:solidFill>
             <a:srgbClr val="0098BB"/>
           </a:solidFill>
-          <a:ln w="12700">
-            <a:solidFill>
-              <a:srgbClr val="333333"/>
-            </a:solidFill>
-            <a:prstDash val="solid"/>
+          <a:ln>
+            <a:noFill/>
           </a:ln>
         </p:spPr>
       </p:sp>
@@ -5986,9 +5700,9 @@
                 <a:solidFill>
                   <a:srgbClr val="FFFFFF"/>
                 </a:solidFill>
-                <a:latin typeface="Meiryo UI" pitchFamily="34" charset="0"/>
-                <a:ea typeface="Meiryo UI" pitchFamily="34" charset="-122"/>
-                <a:cs typeface="Meiryo UI" pitchFamily="34" charset="-120"/>
+                <a:latin typeface="Meiryo" pitchFamily="34" charset="0"/>
+                <a:ea typeface="Meiryo" pitchFamily="34" charset="-122"/>
+                <a:cs typeface="Meiryo" pitchFamily="34" charset="-120"/>
               </a:rPr>
               <a:t>4</a:t>
             </a:r>
@@ -6028,9 +5742,9 @@
                 <a:solidFill>
                   <a:srgbClr val="1A2E35"/>
                 </a:solidFill>
-                <a:latin typeface="Meiryo UI" pitchFamily="34" charset="0"/>
-                <a:ea typeface="Meiryo UI" pitchFamily="34" charset="-122"/>
-                <a:cs typeface="Meiryo UI" pitchFamily="34" charset="-120"/>
+                <a:latin typeface="Meiryo" pitchFamily="34" charset="0"/>
+                <a:ea typeface="Meiryo" pitchFamily="34" charset="-122"/>
+                <a:cs typeface="Meiryo" pitchFamily="34" charset="-120"/>
               </a:rPr>
               <a:t>{{FEATURE_4}}</a:t>
             </a:r>
@@ -6080,11 +5794,8 @@
           <a:solidFill>
             <a:srgbClr val="004F65"/>
           </a:solidFill>
-          <a:ln w="12700">
-            <a:solidFill>
-              <a:srgbClr val="333333"/>
-            </a:solidFill>
-            <a:prstDash val="solid"/>
+          <a:ln>
+            <a:noFill/>
           </a:ln>
         </p:spPr>
       </p:sp>
@@ -6107,11 +5818,8 @@
               <a:alpha val="15000"/>
             </a:srgbClr>
           </a:solidFill>
-          <a:ln w="12700">
-            <a:solidFill>
-              <a:srgbClr val="333333"/>
-            </a:solidFill>
-            <a:prstDash val="solid"/>
+          <a:ln>
+            <a:noFill/>
           </a:ln>
         </p:spPr>
       </p:sp>
@@ -6134,11 +5842,8 @@
               <a:alpha val="70000"/>
             </a:srgbClr>
           </a:solidFill>
-          <a:ln w="12700">
-            <a:solidFill>
-              <a:srgbClr val="333333"/>
-            </a:solidFill>
-            <a:prstDash val="solid"/>
+          <a:ln>
+            <a:noFill/>
           </a:ln>
         </p:spPr>
       </p:sp>
@@ -6157,13 +5862,10 @@
             <a:avLst/>
           </a:prstGeom>
           <a:solidFill>
-            <a:srgbClr val="F0A000"/>
-          </a:solidFill>
-          <a:ln w="12700">
-            <a:solidFill>
-              <a:srgbClr val="333333"/>
-            </a:solidFill>
-            <a:prstDash val="solid"/>
+            <a:srgbClr val="0098BB"/>
+          </a:solidFill>
+          <a:ln>
+            <a:noFill/>
           </a:ln>
         </p:spPr>
       </p:sp>
@@ -6196,9 +5898,9 @@
                 <a:solidFill>
                   <a:srgbClr val="FFFFFF"/>
                 </a:solidFill>
-                <a:latin typeface="Meiryo UI" pitchFamily="34" charset="0"/>
-                <a:ea typeface="Meiryo UI" pitchFamily="34" charset="-122"/>
-                <a:cs typeface="Meiryo UI" pitchFamily="34" charset="-120"/>
+                <a:latin typeface="Meiryo" pitchFamily="34" charset="0"/>
+                <a:ea typeface="Meiryo" pitchFamily="34" charset="-122"/>
+                <a:cs typeface="Meiryo" pitchFamily="34" charset="-120"/>
               </a:rPr>
               <a:t>04   導入効果・期待 KPI</a:t>
             </a:r>
@@ -6223,11 +5925,8 @@
           <a:solidFill>
             <a:srgbClr val="006F8A"/>
           </a:solidFill>
-          <a:ln w="12700">
-            <a:solidFill>
-              <a:srgbClr val="333333"/>
-            </a:solidFill>
-            <a:prstDash val="solid"/>
+          <a:ln>
+            <a:noFill/>
           </a:ln>
         </p:spPr>
       </p:sp>
@@ -6260,9 +5959,9 @@
                 <a:solidFill>
                   <a:srgbClr val="AADDE8"/>
                 </a:solidFill>
-                <a:latin typeface="Meiryo UI" pitchFamily="34" charset="0"/>
-                <a:ea typeface="Meiryo UI" pitchFamily="34" charset="-122"/>
-                <a:cs typeface="Meiryo UI" pitchFamily="34" charset="-120"/>
+                <a:latin typeface="Meiryo" pitchFamily="34" charset="0"/>
+                <a:ea typeface="Meiryo" pitchFamily="34" charset="-122"/>
+                <a:cs typeface="Meiryo" pitchFamily="34" charset="-120"/>
               </a:rPr>
               <a:t>Novagrid</a:t>
             </a:r>
@@ -6299,9 +5998,9 @@
                 <a:solidFill>
                   <a:srgbClr val="AADDE8"/>
                 </a:solidFill>
-                <a:latin typeface="Meiryo UI" pitchFamily="34" charset="0"/>
-                <a:ea typeface="Meiryo UI" pitchFamily="34" charset="-122"/>
-                <a:cs typeface="Meiryo UI" pitchFamily="34" charset="-120"/>
+                <a:latin typeface="Meiryo" pitchFamily="34" charset="0"/>
+                <a:ea typeface="Meiryo" pitchFamily="34" charset="-122"/>
+                <a:cs typeface="Meiryo" pitchFamily="34" charset="-120"/>
               </a:rPr>
               <a:t>6 / 9</a:t>
             </a:r>
@@ -6330,7 +6029,7 @@
           </a:solidFill>
           <a:ln w="22860">
             <a:solidFill>
-              <a:srgbClr val="F0A000"/>
+              <a:srgbClr val="0098BB"/>
             </a:solidFill>
             <a:prstDash val="solid"/>
           </a:ln>
@@ -6351,13 +6050,10 @@
             <a:avLst/>
           </a:prstGeom>
           <a:solidFill>
-            <a:srgbClr val="F0A000"/>
-          </a:solidFill>
-          <a:ln w="12700">
-            <a:solidFill>
-              <a:srgbClr val="333333"/>
-            </a:solidFill>
-            <a:prstDash val="solid"/>
+            <a:srgbClr val="0098BB"/>
+          </a:solidFill>
+          <a:ln>
+            <a:noFill/>
           </a:ln>
         </p:spPr>
       </p:sp>
@@ -6390,9 +6086,9 @@
                 <a:solidFill>
                   <a:srgbClr val="FFFFFF"/>
                 </a:solidFill>
-                <a:latin typeface="Meiryo UI" pitchFamily="34" charset="0"/>
-                <a:ea typeface="Meiryo UI" pitchFamily="34" charset="-122"/>
-                <a:cs typeface="Meiryo UI" pitchFamily="34" charset="-120"/>
+                <a:latin typeface="Meiryo" pitchFamily="34" charset="0"/>
+                <a:ea typeface="Meiryo" pitchFamily="34" charset="-122"/>
+                <a:cs typeface="Meiryo" pitchFamily="34" charset="-120"/>
               </a:rPr>
               <a:t>{{KPI_LABEL_1}}</a:t>
             </a:r>
@@ -6427,11 +6123,11 @@
             <a:r>
               <a:rPr lang="en-US" sz="7000" b="1" dirty="0">
                 <a:solidFill>
-                  <a:srgbClr val="F0A000"/>
-                </a:solidFill>
-                <a:latin typeface="Meiryo UI" pitchFamily="34" charset="0"/>
-                <a:ea typeface="Meiryo UI" pitchFamily="34" charset="-122"/>
-                <a:cs typeface="Meiryo UI" pitchFamily="34" charset="-120"/>
+                  <a:srgbClr val="0098BB"/>
+                </a:solidFill>
+                <a:latin typeface="Meiryo" pitchFamily="34" charset="0"/>
+                <a:ea typeface="Meiryo" pitchFamily="34" charset="-122"/>
+                <a:cs typeface="Meiryo" pitchFamily="34" charset="-120"/>
               </a:rPr>
               <a:t>{{KPI_VALUE_1}}</a:t>
             </a:r>
@@ -6466,11 +6162,11 @@
             <a:r>
               <a:rPr lang="en-US" sz="1700" b="1" dirty="0">
                 <a:solidFill>
-                  <a:srgbClr val="F0A000"/>
-                </a:solidFill>
-                <a:latin typeface="Meiryo UI" pitchFamily="34" charset="0"/>
-                <a:ea typeface="Meiryo UI" pitchFamily="34" charset="-122"/>
-                <a:cs typeface="Meiryo UI" pitchFamily="34" charset="-120"/>
+                  <a:srgbClr val="0098BB"/>
+                </a:solidFill>
+                <a:latin typeface="Meiryo" pitchFamily="34" charset="0"/>
+                <a:ea typeface="Meiryo" pitchFamily="34" charset="-122"/>
+                <a:cs typeface="Meiryo" pitchFamily="34" charset="-120"/>
               </a:rPr>
               <a:t>{{KPI_UNIT_1}}</a:t>
             </a:r>
@@ -6493,13 +6189,10 @@
             <a:avLst/>
           </a:prstGeom>
           <a:solidFill>
-            <a:srgbClr val="F0A000"/>
-          </a:solidFill>
-          <a:ln w="12700">
-            <a:solidFill>
-              <a:srgbClr val="333333"/>
-            </a:solidFill>
-            <a:prstDash val="solid"/>
+            <a:srgbClr val="0098BB"/>
+          </a:solidFill>
+          <a:ln>
+            <a:noFill/>
           </a:ln>
         </p:spPr>
       </p:sp>
@@ -6535,9 +6228,9 @@
                 <a:solidFill>
                   <a:srgbClr val="B0CDD5"/>
                 </a:solidFill>
-                <a:latin typeface="Meiryo UI" pitchFamily="34" charset="0"/>
-                <a:ea typeface="Meiryo UI" pitchFamily="34" charset="-122"/>
-                <a:cs typeface="Meiryo UI" pitchFamily="34" charset="-120"/>
+                <a:latin typeface="Meiryo" pitchFamily="34" charset="0"/>
+                <a:ea typeface="Meiryo" pitchFamily="34" charset="-122"/>
+                <a:cs typeface="Meiryo" pitchFamily="34" charset="-120"/>
               </a:rPr>
               <a:t>{{KPI_NOTE_1}}</a:t>
             </a:r>
@@ -6566,7 +6259,7 @@
           </a:solidFill>
           <a:ln w="22860">
             <a:solidFill>
-              <a:srgbClr val="00B8D9"/>
+              <a:srgbClr val="0098BB"/>
             </a:solidFill>
             <a:prstDash val="solid"/>
           </a:ln>
@@ -6587,13 +6280,10 @@
             <a:avLst/>
           </a:prstGeom>
           <a:solidFill>
-            <a:srgbClr val="00B8D9"/>
-          </a:solidFill>
-          <a:ln w="12700">
-            <a:solidFill>
-              <a:srgbClr val="333333"/>
-            </a:solidFill>
-            <a:prstDash val="solid"/>
+            <a:srgbClr val="0098BB"/>
+          </a:solidFill>
+          <a:ln>
+            <a:noFill/>
           </a:ln>
         </p:spPr>
       </p:sp>
@@ -6626,9 +6316,9 @@
                 <a:solidFill>
                   <a:srgbClr val="FFFFFF"/>
                 </a:solidFill>
-                <a:latin typeface="Meiryo UI" pitchFamily="34" charset="0"/>
-                <a:ea typeface="Meiryo UI" pitchFamily="34" charset="-122"/>
-                <a:cs typeface="Meiryo UI" pitchFamily="34" charset="-120"/>
+                <a:latin typeface="Meiryo" pitchFamily="34" charset="0"/>
+                <a:ea typeface="Meiryo" pitchFamily="34" charset="-122"/>
+                <a:cs typeface="Meiryo" pitchFamily="34" charset="-120"/>
               </a:rPr>
               <a:t>{{KPI_LABEL_2}}</a:t>
             </a:r>
@@ -6663,11 +6353,11 @@
             <a:r>
               <a:rPr lang="en-US" sz="7000" b="1" dirty="0">
                 <a:solidFill>
-                  <a:srgbClr val="00B8D9"/>
-                </a:solidFill>
-                <a:latin typeface="Meiryo UI" pitchFamily="34" charset="0"/>
-                <a:ea typeface="Meiryo UI" pitchFamily="34" charset="-122"/>
-                <a:cs typeface="Meiryo UI" pitchFamily="34" charset="-120"/>
+                  <a:srgbClr val="0098BB"/>
+                </a:solidFill>
+                <a:latin typeface="Meiryo" pitchFamily="34" charset="0"/>
+                <a:ea typeface="Meiryo" pitchFamily="34" charset="-122"/>
+                <a:cs typeface="Meiryo" pitchFamily="34" charset="-120"/>
               </a:rPr>
               <a:t>{{KPI_VALUE_2}}</a:t>
             </a:r>
@@ -6702,11 +6392,11 @@
             <a:r>
               <a:rPr lang="en-US" sz="1700" b="1" dirty="0">
                 <a:solidFill>
-                  <a:srgbClr val="00B8D9"/>
-                </a:solidFill>
-                <a:latin typeface="Meiryo UI" pitchFamily="34" charset="0"/>
-                <a:ea typeface="Meiryo UI" pitchFamily="34" charset="-122"/>
-                <a:cs typeface="Meiryo UI" pitchFamily="34" charset="-120"/>
+                  <a:srgbClr val="0098BB"/>
+                </a:solidFill>
+                <a:latin typeface="Meiryo" pitchFamily="34" charset="0"/>
+                <a:ea typeface="Meiryo" pitchFamily="34" charset="-122"/>
+                <a:cs typeface="Meiryo" pitchFamily="34" charset="-120"/>
               </a:rPr>
               <a:t>{{KPI_UNIT_2}}</a:t>
             </a:r>
@@ -6729,13 +6419,10 @@
             <a:avLst/>
           </a:prstGeom>
           <a:solidFill>
-            <a:srgbClr val="00B8D9"/>
-          </a:solidFill>
-          <a:ln w="12700">
-            <a:solidFill>
-              <a:srgbClr val="333333"/>
-            </a:solidFill>
-            <a:prstDash val="solid"/>
+            <a:srgbClr val="0098BB"/>
+          </a:solidFill>
+          <a:ln>
+            <a:noFill/>
           </a:ln>
         </p:spPr>
       </p:sp>
@@ -6771,9 +6458,9 @@
                 <a:solidFill>
                   <a:srgbClr val="B0CDD5"/>
                 </a:solidFill>
-                <a:latin typeface="Meiryo UI" pitchFamily="34" charset="0"/>
-                <a:ea typeface="Meiryo UI" pitchFamily="34" charset="-122"/>
-                <a:cs typeface="Meiryo UI" pitchFamily="34" charset="-120"/>
+                <a:latin typeface="Meiryo" pitchFamily="34" charset="0"/>
+                <a:ea typeface="Meiryo" pitchFamily="34" charset="-122"/>
+                <a:cs typeface="Meiryo" pitchFamily="34" charset="-120"/>
               </a:rPr>
               <a:t>{{KPI_NOTE_2}}</a:t>
             </a:r>
@@ -6802,7 +6489,7 @@
           </a:solidFill>
           <a:ln w="22860">
             <a:solidFill>
-              <a:srgbClr val="6FCF97"/>
+              <a:srgbClr val="0098BB"/>
             </a:solidFill>
             <a:prstDash val="solid"/>
           </a:ln>
@@ -6823,13 +6510,10 @@
             <a:avLst/>
           </a:prstGeom>
           <a:solidFill>
-            <a:srgbClr val="6FCF97"/>
-          </a:solidFill>
-          <a:ln w="12700">
-            <a:solidFill>
-              <a:srgbClr val="333333"/>
-            </a:solidFill>
-            <a:prstDash val="solid"/>
+            <a:srgbClr val="0098BB"/>
+          </a:solidFill>
+          <a:ln>
+            <a:noFill/>
           </a:ln>
         </p:spPr>
       </p:sp>
@@ -6862,9 +6546,9 @@
                 <a:solidFill>
                   <a:srgbClr val="FFFFFF"/>
                 </a:solidFill>
-                <a:latin typeface="Meiryo UI" pitchFamily="34" charset="0"/>
-                <a:ea typeface="Meiryo UI" pitchFamily="34" charset="-122"/>
-                <a:cs typeface="Meiryo UI" pitchFamily="34" charset="-120"/>
+                <a:latin typeface="Meiryo" pitchFamily="34" charset="0"/>
+                <a:ea typeface="Meiryo" pitchFamily="34" charset="-122"/>
+                <a:cs typeface="Meiryo" pitchFamily="34" charset="-120"/>
               </a:rPr>
               <a:t>{{KPI_LABEL_3}}</a:t>
             </a:r>
@@ -6899,11 +6583,11 @@
             <a:r>
               <a:rPr lang="en-US" sz="7000" b="1" dirty="0">
                 <a:solidFill>
-                  <a:srgbClr val="6FCF97"/>
-                </a:solidFill>
-                <a:latin typeface="Meiryo UI" pitchFamily="34" charset="0"/>
-                <a:ea typeface="Meiryo UI" pitchFamily="34" charset="-122"/>
-                <a:cs typeface="Meiryo UI" pitchFamily="34" charset="-120"/>
+                  <a:srgbClr val="0098BB"/>
+                </a:solidFill>
+                <a:latin typeface="Meiryo" pitchFamily="34" charset="0"/>
+                <a:ea typeface="Meiryo" pitchFamily="34" charset="-122"/>
+                <a:cs typeface="Meiryo" pitchFamily="34" charset="-120"/>
               </a:rPr>
               <a:t>{{KPI_VALUE_3}}</a:t>
             </a:r>
@@ -6938,11 +6622,11 @@
             <a:r>
               <a:rPr lang="en-US" sz="1700" b="1" dirty="0">
                 <a:solidFill>
-                  <a:srgbClr val="6FCF97"/>
-                </a:solidFill>
-                <a:latin typeface="Meiryo UI" pitchFamily="34" charset="0"/>
-                <a:ea typeface="Meiryo UI" pitchFamily="34" charset="-122"/>
-                <a:cs typeface="Meiryo UI" pitchFamily="34" charset="-120"/>
+                  <a:srgbClr val="0098BB"/>
+                </a:solidFill>
+                <a:latin typeface="Meiryo" pitchFamily="34" charset="0"/>
+                <a:ea typeface="Meiryo" pitchFamily="34" charset="-122"/>
+                <a:cs typeface="Meiryo" pitchFamily="34" charset="-120"/>
               </a:rPr>
               <a:t>{{KPI_UNIT_3}}</a:t>
             </a:r>
@@ -6965,13 +6649,10 @@
             <a:avLst/>
           </a:prstGeom>
           <a:solidFill>
-            <a:srgbClr val="6FCF97"/>
-          </a:solidFill>
-          <a:ln w="12700">
-            <a:solidFill>
-              <a:srgbClr val="333333"/>
-            </a:solidFill>
-            <a:prstDash val="solid"/>
+            <a:srgbClr val="0098BB"/>
+          </a:solidFill>
+          <a:ln>
+            <a:noFill/>
           </a:ln>
         </p:spPr>
       </p:sp>
@@ -7007,9 +6688,9 @@
                 <a:solidFill>
                   <a:srgbClr val="B0CDD5"/>
                 </a:solidFill>
-                <a:latin typeface="Meiryo UI" pitchFamily="34" charset="0"/>
-                <a:ea typeface="Meiryo UI" pitchFamily="34" charset="-122"/>
-                <a:cs typeface="Meiryo UI" pitchFamily="34" charset="-120"/>
+                <a:latin typeface="Meiryo" pitchFamily="34" charset="0"/>
+                <a:ea typeface="Meiryo" pitchFamily="34" charset="-122"/>
+                <a:cs typeface="Meiryo" pitchFamily="34" charset="-120"/>
               </a:rPr>
               <a:t>{{KPI_NOTE_3}}</a:t>
             </a:r>
@@ -7059,11 +6740,8 @@
           <a:solidFill>
             <a:srgbClr val="F4FBFD"/>
           </a:solidFill>
-          <a:ln w="12700">
-            <a:solidFill>
-              <a:srgbClr val="333333"/>
-            </a:solidFill>
-            <a:prstDash val="solid"/>
+          <a:ln>
+            <a:noFill/>
           </a:ln>
         </p:spPr>
       </p:sp>
@@ -7084,11 +6762,8 @@
           <a:solidFill>
             <a:srgbClr val="006F8A"/>
           </a:solidFill>
-          <a:ln w="12700">
-            <a:solidFill>
-              <a:srgbClr val="333333"/>
-            </a:solidFill>
-            <a:prstDash val="solid"/>
+          <a:ln>
+            <a:noFill/>
           </a:ln>
         </p:spPr>
       </p:sp>
@@ -7107,13 +6782,10 @@
             <a:avLst/>
           </a:prstGeom>
           <a:solidFill>
-            <a:srgbClr val="F0A000"/>
-          </a:solidFill>
-          <a:ln w="12700">
-            <a:solidFill>
-              <a:srgbClr val="333333"/>
-            </a:solidFill>
-            <a:prstDash val="solid"/>
+            <a:srgbClr val="0098BB"/>
+          </a:solidFill>
+          <a:ln>
+            <a:noFill/>
           </a:ln>
         </p:spPr>
       </p:sp>
@@ -7146,9 +6818,9 @@
                 <a:solidFill>
                   <a:srgbClr val="FFFFFF"/>
                 </a:solidFill>
-                <a:latin typeface="Meiryo UI" pitchFamily="34" charset="0"/>
-                <a:ea typeface="Meiryo UI" pitchFamily="34" charset="-122"/>
-                <a:cs typeface="Meiryo UI" pitchFamily="34" charset="-120"/>
+                <a:latin typeface="Meiryo" pitchFamily="34" charset="0"/>
+                <a:ea typeface="Meiryo" pitchFamily="34" charset="-122"/>
+                <a:cs typeface="Meiryo" pitchFamily="34" charset="-120"/>
               </a:rPr>
               <a:t>05   導入ステップ・スケジュール</a:t>
             </a:r>
@@ -7173,11 +6845,8 @@
           <a:solidFill>
             <a:srgbClr val="006F8A"/>
           </a:solidFill>
-          <a:ln w="12700">
-            <a:solidFill>
-              <a:srgbClr val="333333"/>
-            </a:solidFill>
-            <a:prstDash val="solid"/>
+          <a:ln>
+            <a:noFill/>
           </a:ln>
         </p:spPr>
       </p:sp>
@@ -7210,9 +6879,9 @@
                 <a:solidFill>
                   <a:srgbClr val="AADDE8"/>
                 </a:solidFill>
-                <a:latin typeface="Meiryo UI" pitchFamily="34" charset="0"/>
-                <a:ea typeface="Meiryo UI" pitchFamily="34" charset="-122"/>
-                <a:cs typeface="Meiryo UI" pitchFamily="34" charset="-120"/>
+                <a:latin typeface="Meiryo" pitchFamily="34" charset="0"/>
+                <a:ea typeface="Meiryo" pitchFamily="34" charset="-122"/>
+                <a:cs typeface="Meiryo" pitchFamily="34" charset="-120"/>
               </a:rPr>
               <a:t>Novagrid</a:t>
             </a:r>
@@ -7249,9 +6918,9 @@
                 <a:solidFill>
                   <a:srgbClr val="AADDE8"/>
                 </a:solidFill>
-                <a:latin typeface="Meiryo UI" pitchFamily="34" charset="0"/>
-                <a:ea typeface="Meiryo UI" pitchFamily="34" charset="-122"/>
-                <a:cs typeface="Meiryo UI" pitchFamily="34" charset="-120"/>
+                <a:latin typeface="Meiryo" pitchFamily="34" charset="0"/>
+                <a:ea typeface="Meiryo" pitchFamily="34" charset="-122"/>
+                <a:cs typeface="Meiryo" pitchFamily="34" charset="-120"/>
               </a:rPr>
               <a:t>7 / 9</a:t>
             </a:r>
@@ -7276,11 +6945,8 @@
           <a:solidFill>
             <a:srgbClr val="D8E8EC"/>
           </a:solidFill>
-          <a:ln w="12700">
-            <a:solidFill>
-              <a:srgbClr val="333333"/>
-            </a:solidFill>
-            <a:prstDash val="solid"/>
+          <a:ln>
+            <a:noFill/>
           </a:ln>
         </p:spPr>
       </p:sp>
@@ -7301,11 +6967,8 @@
           <a:solidFill>
             <a:srgbClr val="0098BB"/>
           </a:solidFill>
-          <a:ln w="12700">
-            <a:solidFill>
-              <a:srgbClr val="333333"/>
-            </a:solidFill>
-            <a:prstDash val="solid"/>
+          <a:ln>
+            <a:noFill/>
           </a:ln>
         </p:spPr>
       </p:sp>
@@ -7338,9 +7001,9 @@
                 <a:solidFill>
                   <a:srgbClr val="FFFFFF"/>
                 </a:solidFill>
-                <a:latin typeface="Meiryo UI" pitchFamily="34" charset="0"/>
-                <a:ea typeface="Meiryo UI" pitchFamily="34" charset="-122"/>
-                <a:cs typeface="Meiryo UI" pitchFamily="34" charset="-120"/>
+                <a:latin typeface="Meiryo" pitchFamily="34" charset="0"/>
+                <a:ea typeface="Meiryo" pitchFamily="34" charset="-122"/>
+                <a:cs typeface="Meiryo" pitchFamily="34" charset="-120"/>
               </a:rPr>
               <a:t>{{STEP_1_PERIOD}}</a:t>
             </a:r>
@@ -7402,9 +7065,9 @@
                 <a:solidFill>
                   <a:srgbClr val="0098BB"/>
                 </a:solidFill>
-                <a:latin typeface="Meiryo UI" pitchFamily="34" charset="0"/>
-                <a:ea typeface="Meiryo UI" pitchFamily="34" charset="-122"/>
-                <a:cs typeface="Meiryo UI" pitchFamily="34" charset="-120"/>
+                <a:latin typeface="Meiryo" pitchFamily="34" charset="0"/>
+                <a:ea typeface="Meiryo" pitchFamily="34" charset="-122"/>
+                <a:cs typeface="Meiryo" pitchFamily="34" charset="-120"/>
               </a:rPr>
               <a:t>1</a:t>
             </a:r>
@@ -7466,9 +7129,9 @@
                 <a:solidFill>
                   <a:srgbClr val="006F8A"/>
                 </a:solidFill>
-                <a:latin typeface="Meiryo UI" pitchFamily="34" charset="0"/>
-                <a:ea typeface="Meiryo UI" pitchFamily="34" charset="-122"/>
-                <a:cs typeface="Meiryo UI" pitchFamily="34" charset="-120"/>
+                <a:latin typeface="Meiryo" pitchFamily="34" charset="0"/>
+                <a:ea typeface="Meiryo" pitchFamily="34" charset="-122"/>
+                <a:cs typeface="Meiryo" pitchFamily="34" charset="-120"/>
               </a:rPr>
               <a:t>{{STEP_1_TITLE}}</a:t>
             </a:r>
@@ -7508,9 +7171,9 @@
                 <a:solidFill>
                   <a:srgbClr val="2C4A52"/>
                 </a:solidFill>
-                <a:latin typeface="Meiryo UI" pitchFamily="34" charset="0"/>
-                <a:ea typeface="Meiryo UI" pitchFamily="34" charset="-122"/>
-                <a:cs typeface="Meiryo UI" pitchFamily="34" charset="-120"/>
+                <a:latin typeface="Meiryo" pitchFamily="34" charset="0"/>
+                <a:ea typeface="Meiryo" pitchFamily="34" charset="-122"/>
+                <a:cs typeface="Meiryo" pitchFamily="34" charset="-120"/>
               </a:rPr>
               <a:t>{{STEP_1_DESC}}</a:t>
             </a:r>
@@ -7535,11 +7198,8 @@
           <a:solidFill>
             <a:srgbClr val="0098BB"/>
           </a:solidFill>
-          <a:ln w="12700">
-            <a:solidFill>
-              <a:srgbClr val="333333"/>
-            </a:solidFill>
-            <a:prstDash val="solid"/>
+          <a:ln>
+            <a:noFill/>
           </a:ln>
         </p:spPr>
       </p:sp>
@@ -7572,9 +7232,9 @@
                 <a:solidFill>
                   <a:srgbClr val="FFFFFF"/>
                 </a:solidFill>
-                <a:latin typeface="Meiryo UI" pitchFamily="34" charset="0"/>
-                <a:ea typeface="Meiryo UI" pitchFamily="34" charset="-122"/>
-                <a:cs typeface="Meiryo UI" pitchFamily="34" charset="-120"/>
+                <a:latin typeface="Meiryo" pitchFamily="34" charset="0"/>
+                <a:ea typeface="Meiryo" pitchFamily="34" charset="-122"/>
+                <a:cs typeface="Meiryo" pitchFamily="34" charset="-120"/>
               </a:rPr>
               <a:t>{{STEP_2_PERIOD}}</a:t>
             </a:r>
@@ -7636,9 +7296,9 @@
                 <a:solidFill>
                   <a:srgbClr val="0098BB"/>
                 </a:solidFill>
-                <a:latin typeface="Meiryo UI" pitchFamily="34" charset="0"/>
-                <a:ea typeface="Meiryo UI" pitchFamily="34" charset="-122"/>
-                <a:cs typeface="Meiryo UI" pitchFamily="34" charset="-120"/>
+                <a:latin typeface="Meiryo" pitchFamily="34" charset="0"/>
+                <a:ea typeface="Meiryo" pitchFamily="34" charset="-122"/>
+                <a:cs typeface="Meiryo" pitchFamily="34" charset="-120"/>
               </a:rPr>
               <a:t>2</a:t>
             </a:r>
@@ -7700,9 +7360,9 @@
                 <a:solidFill>
                   <a:srgbClr val="006F8A"/>
                 </a:solidFill>
-                <a:latin typeface="Meiryo UI" pitchFamily="34" charset="0"/>
-                <a:ea typeface="Meiryo UI" pitchFamily="34" charset="-122"/>
-                <a:cs typeface="Meiryo UI" pitchFamily="34" charset="-120"/>
+                <a:latin typeface="Meiryo" pitchFamily="34" charset="0"/>
+                <a:ea typeface="Meiryo" pitchFamily="34" charset="-122"/>
+                <a:cs typeface="Meiryo" pitchFamily="34" charset="-120"/>
               </a:rPr>
               <a:t>{{STEP_2_TITLE}}</a:t>
             </a:r>
@@ -7742,9 +7402,9 @@
                 <a:solidFill>
                   <a:srgbClr val="2C4A52"/>
                 </a:solidFill>
-                <a:latin typeface="Meiryo UI" pitchFamily="34" charset="0"/>
-                <a:ea typeface="Meiryo UI" pitchFamily="34" charset="-122"/>
-                <a:cs typeface="Meiryo UI" pitchFamily="34" charset="-120"/>
+                <a:latin typeface="Meiryo" pitchFamily="34" charset="0"/>
+                <a:ea typeface="Meiryo" pitchFamily="34" charset="-122"/>
+                <a:cs typeface="Meiryo" pitchFamily="34" charset="-120"/>
               </a:rPr>
               <a:t>{{STEP_2_DESC}}</a:t>
             </a:r>
@@ -7769,11 +7429,8 @@
           <a:solidFill>
             <a:srgbClr val="0098BB"/>
           </a:solidFill>
-          <a:ln w="12700">
-            <a:solidFill>
-              <a:srgbClr val="333333"/>
-            </a:solidFill>
-            <a:prstDash val="solid"/>
+          <a:ln>
+            <a:noFill/>
           </a:ln>
         </p:spPr>
       </p:sp>
@@ -7806,9 +7463,9 @@
                 <a:solidFill>
                   <a:srgbClr val="FFFFFF"/>
                 </a:solidFill>
-                <a:latin typeface="Meiryo UI" pitchFamily="34" charset="0"/>
-                <a:ea typeface="Meiryo UI" pitchFamily="34" charset="-122"/>
-                <a:cs typeface="Meiryo UI" pitchFamily="34" charset="-120"/>
+                <a:latin typeface="Meiryo" pitchFamily="34" charset="0"/>
+                <a:ea typeface="Meiryo" pitchFamily="34" charset="-122"/>
+                <a:cs typeface="Meiryo" pitchFamily="34" charset="-120"/>
               </a:rPr>
               <a:t>{{STEP_3_PERIOD}}</a:t>
             </a:r>
@@ -7870,9 +7527,9 @@
                 <a:solidFill>
                   <a:srgbClr val="0098BB"/>
                 </a:solidFill>
-                <a:latin typeface="Meiryo UI" pitchFamily="34" charset="0"/>
-                <a:ea typeface="Meiryo UI" pitchFamily="34" charset="-122"/>
-                <a:cs typeface="Meiryo UI" pitchFamily="34" charset="-120"/>
+                <a:latin typeface="Meiryo" pitchFamily="34" charset="0"/>
+                <a:ea typeface="Meiryo" pitchFamily="34" charset="-122"/>
+                <a:cs typeface="Meiryo" pitchFamily="34" charset="-120"/>
               </a:rPr>
               <a:t>3</a:t>
             </a:r>
@@ -7934,9 +7591,9 @@
                 <a:solidFill>
                   <a:srgbClr val="006F8A"/>
                 </a:solidFill>
-                <a:latin typeface="Meiryo UI" pitchFamily="34" charset="0"/>
-                <a:ea typeface="Meiryo UI" pitchFamily="34" charset="-122"/>
-                <a:cs typeface="Meiryo UI" pitchFamily="34" charset="-120"/>
+                <a:latin typeface="Meiryo" pitchFamily="34" charset="0"/>
+                <a:ea typeface="Meiryo" pitchFamily="34" charset="-122"/>
+                <a:cs typeface="Meiryo" pitchFamily="34" charset="-120"/>
               </a:rPr>
               <a:t>{{STEP_3_TITLE}}</a:t>
             </a:r>
@@ -7976,9 +7633,9 @@
                 <a:solidFill>
                   <a:srgbClr val="2C4A52"/>
                 </a:solidFill>
-                <a:latin typeface="Meiryo UI" pitchFamily="34" charset="0"/>
-                <a:ea typeface="Meiryo UI" pitchFamily="34" charset="-122"/>
-                <a:cs typeface="Meiryo UI" pitchFamily="34" charset="-120"/>
+                <a:latin typeface="Meiryo" pitchFamily="34" charset="0"/>
+                <a:ea typeface="Meiryo" pitchFamily="34" charset="-122"/>
+                <a:cs typeface="Meiryo" pitchFamily="34" charset="-120"/>
               </a:rPr>
               <a:t>{{STEP_3_DESC}}</a:t>
             </a:r>
@@ -8003,11 +7660,8 @@
           <a:solidFill>
             <a:srgbClr val="0098BB"/>
           </a:solidFill>
-          <a:ln w="12700">
-            <a:solidFill>
-              <a:srgbClr val="333333"/>
-            </a:solidFill>
-            <a:prstDash val="solid"/>
+          <a:ln>
+            <a:noFill/>
           </a:ln>
         </p:spPr>
       </p:sp>
@@ -8040,9 +7694,9 @@
                 <a:solidFill>
                   <a:srgbClr val="FFFFFF"/>
                 </a:solidFill>
-                <a:latin typeface="Meiryo UI" pitchFamily="34" charset="0"/>
-                <a:ea typeface="Meiryo UI" pitchFamily="34" charset="-122"/>
-                <a:cs typeface="Meiryo UI" pitchFamily="34" charset="-120"/>
+                <a:latin typeface="Meiryo" pitchFamily="34" charset="0"/>
+                <a:ea typeface="Meiryo" pitchFamily="34" charset="-122"/>
+                <a:cs typeface="Meiryo" pitchFamily="34" charset="-120"/>
               </a:rPr>
               <a:t>{{STEP_4_PERIOD}}</a:t>
             </a:r>
@@ -8104,9 +7758,9 @@
                 <a:solidFill>
                   <a:srgbClr val="0098BB"/>
                 </a:solidFill>
-                <a:latin typeface="Meiryo UI" pitchFamily="34" charset="0"/>
-                <a:ea typeface="Meiryo UI" pitchFamily="34" charset="-122"/>
-                <a:cs typeface="Meiryo UI" pitchFamily="34" charset="-120"/>
+                <a:latin typeface="Meiryo" pitchFamily="34" charset="0"/>
+                <a:ea typeface="Meiryo" pitchFamily="34" charset="-122"/>
+                <a:cs typeface="Meiryo" pitchFamily="34" charset="-120"/>
               </a:rPr>
               <a:t>4</a:t>
             </a:r>
@@ -8168,9 +7822,9 @@
                 <a:solidFill>
                   <a:srgbClr val="006F8A"/>
                 </a:solidFill>
-                <a:latin typeface="Meiryo UI" pitchFamily="34" charset="0"/>
-                <a:ea typeface="Meiryo UI" pitchFamily="34" charset="-122"/>
-                <a:cs typeface="Meiryo UI" pitchFamily="34" charset="-120"/>
+                <a:latin typeface="Meiryo" pitchFamily="34" charset="0"/>
+                <a:ea typeface="Meiryo" pitchFamily="34" charset="-122"/>
+                <a:cs typeface="Meiryo" pitchFamily="34" charset="-120"/>
               </a:rPr>
               <a:t>{{STEP_4_TITLE}}</a:t>
             </a:r>
@@ -8210,9 +7864,9 @@
                 <a:solidFill>
                   <a:srgbClr val="2C4A52"/>
                 </a:solidFill>
-                <a:latin typeface="Meiryo UI" pitchFamily="34" charset="0"/>
-                <a:ea typeface="Meiryo UI" pitchFamily="34" charset="-122"/>
-                <a:cs typeface="Meiryo UI" pitchFamily="34" charset="-120"/>
+                <a:latin typeface="Meiryo" pitchFamily="34" charset="0"/>
+                <a:ea typeface="Meiryo" pitchFamily="34" charset="-122"/>
+                <a:cs typeface="Meiryo" pitchFamily="34" charset="-120"/>
               </a:rPr>
               <a:t>{{STEP_4_DESC}}</a:t>
             </a:r>
@@ -8262,11 +7916,8 @@
           <a:solidFill>
             <a:srgbClr val="F4FBFD"/>
           </a:solidFill>
-          <a:ln w="12700">
-            <a:solidFill>
-              <a:srgbClr val="333333"/>
-            </a:solidFill>
-            <a:prstDash val="solid"/>
+          <a:ln>
+            <a:noFill/>
           </a:ln>
         </p:spPr>
       </p:sp>
@@ -8287,11 +7938,8 @@
           <a:solidFill>
             <a:srgbClr val="006F8A"/>
           </a:solidFill>
-          <a:ln w="12700">
-            <a:solidFill>
-              <a:srgbClr val="333333"/>
-            </a:solidFill>
-            <a:prstDash val="solid"/>
+          <a:ln>
+            <a:noFill/>
           </a:ln>
         </p:spPr>
       </p:sp>
@@ -8310,13 +7958,10 @@
             <a:avLst/>
           </a:prstGeom>
           <a:solidFill>
-            <a:srgbClr val="F0A000"/>
-          </a:solidFill>
-          <a:ln w="12700">
-            <a:solidFill>
-              <a:srgbClr val="333333"/>
-            </a:solidFill>
-            <a:prstDash val="solid"/>
+            <a:srgbClr val="0098BB"/>
+          </a:solidFill>
+          <a:ln>
+            <a:noFill/>
           </a:ln>
         </p:spPr>
       </p:sp>
@@ -8349,9 +7994,9 @@
                 <a:solidFill>
                   <a:srgbClr val="FFFFFF"/>
                 </a:solidFill>
-                <a:latin typeface="Meiryo UI" pitchFamily="34" charset="0"/>
-                <a:ea typeface="Meiryo UI" pitchFamily="34" charset="-122"/>
-                <a:cs typeface="Meiryo UI" pitchFamily="34" charset="-120"/>
+                <a:latin typeface="Meiryo" pitchFamily="34" charset="0"/>
+                <a:ea typeface="Meiryo" pitchFamily="34" charset="-122"/>
+                <a:cs typeface="Meiryo" pitchFamily="34" charset="-120"/>
               </a:rPr>
               <a:t>06   お見積り</a:t>
             </a:r>
@@ -8376,11 +8021,8 @@
           <a:solidFill>
             <a:srgbClr val="006F8A"/>
           </a:solidFill>
-          <a:ln w="12700">
-            <a:solidFill>
-              <a:srgbClr val="333333"/>
-            </a:solidFill>
-            <a:prstDash val="solid"/>
+          <a:ln>
+            <a:noFill/>
           </a:ln>
         </p:spPr>
       </p:sp>
@@ -8413,9 +8055,9 @@
                 <a:solidFill>
                   <a:srgbClr val="AADDE8"/>
                 </a:solidFill>
-                <a:latin typeface="Meiryo UI" pitchFamily="34" charset="0"/>
-                <a:ea typeface="Meiryo UI" pitchFamily="34" charset="-122"/>
-                <a:cs typeface="Meiryo UI" pitchFamily="34" charset="-120"/>
+                <a:latin typeface="Meiryo" pitchFamily="34" charset="0"/>
+                <a:ea typeface="Meiryo" pitchFamily="34" charset="-122"/>
+                <a:cs typeface="Meiryo" pitchFamily="34" charset="-120"/>
               </a:rPr>
               <a:t>Novagrid</a:t>
             </a:r>
@@ -8452,9 +8094,9 @@
                 <a:solidFill>
                   <a:srgbClr val="AADDE8"/>
                 </a:solidFill>
-                <a:latin typeface="Meiryo UI" pitchFamily="34" charset="0"/>
-                <a:ea typeface="Meiryo UI" pitchFamily="34" charset="-122"/>
-                <a:cs typeface="Meiryo UI" pitchFamily="34" charset="-120"/>
+                <a:latin typeface="Meiryo" pitchFamily="34" charset="0"/>
+                <a:ea typeface="Meiryo" pitchFamily="34" charset="-122"/>
+                <a:cs typeface="Meiryo" pitchFamily="34" charset="-120"/>
               </a:rPr>
               <a:t>8 / 9</a:t>
             </a:r>
@@ -8479,11 +8121,8 @@
           <a:solidFill>
             <a:srgbClr val="0098BB"/>
           </a:solidFill>
-          <a:ln w="12700">
-            <a:solidFill>
-              <a:srgbClr val="333333"/>
-            </a:solidFill>
-            <a:prstDash val="solid"/>
+          <a:ln>
+            <a:noFill/>
           </a:ln>
         </p:spPr>
       </p:sp>
@@ -8516,9 +8155,9 @@
                 <a:solidFill>
                   <a:srgbClr val="FFFFFF"/>
                 </a:solidFill>
-                <a:latin typeface="Meiryo UI" pitchFamily="34" charset="0"/>
-                <a:ea typeface="Meiryo UI" pitchFamily="34" charset="-122"/>
-                <a:cs typeface="Meiryo UI" pitchFamily="34" charset="-120"/>
+                <a:latin typeface="Meiryo" pitchFamily="34" charset="0"/>
+                <a:ea typeface="Meiryo" pitchFamily="34" charset="-122"/>
+                <a:cs typeface="Meiryo" pitchFamily="34" charset="-120"/>
               </a:rPr>
               <a:t>費用項目</a:t>
             </a:r>
@@ -8555,9 +8194,9 @@
                 <a:solidFill>
                   <a:srgbClr val="FFFFFF"/>
                 </a:solidFill>
-                <a:latin typeface="Meiryo UI" pitchFamily="34" charset="0"/>
-                <a:ea typeface="Meiryo UI" pitchFamily="34" charset="-122"/>
-                <a:cs typeface="Meiryo UI" pitchFamily="34" charset="-120"/>
+                <a:latin typeface="Meiryo" pitchFamily="34" charset="0"/>
+                <a:ea typeface="Meiryo" pitchFamily="34" charset="-122"/>
+                <a:cs typeface="Meiryo" pitchFamily="34" charset="-120"/>
               </a:rPr>
               <a:t>内容</a:t>
             </a:r>
@@ -8594,9 +8233,9 @@
                 <a:solidFill>
                   <a:srgbClr val="FFFFFF"/>
                 </a:solidFill>
-                <a:latin typeface="Meiryo UI" pitchFamily="34" charset="0"/>
-                <a:ea typeface="Meiryo UI" pitchFamily="34" charset="-122"/>
-                <a:cs typeface="Meiryo UI" pitchFamily="34" charset="-120"/>
+                <a:latin typeface="Meiryo" pitchFamily="34" charset="0"/>
+                <a:ea typeface="Meiryo" pitchFamily="34" charset="-122"/>
+                <a:cs typeface="Meiryo" pitchFamily="34" charset="-120"/>
               </a:rPr>
               <a:t>数量</a:t>
             </a:r>
@@ -8633,9 +8272,9 @@
                 <a:solidFill>
                   <a:srgbClr val="FFFFFF"/>
                 </a:solidFill>
-                <a:latin typeface="Meiryo UI" pitchFamily="34" charset="0"/>
-                <a:ea typeface="Meiryo UI" pitchFamily="34" charset="-122"/>
-                <a:cs typeface="Meiryo UI" pitchFamily="34" charset="-120"/>
+                <a:latin typeface="Meiryo" pitchFamily="34" charset="0"/>
+                <a:ea typeface="Meiryo" pitchFamily="34" charset="-122"/>
+                <a:cs typeface="Meiryo" pitchFamily="34" charset="-120"/>
               </a:rPr>
               <a:t>単価</a:t>
             </a:r>
@@ -8672,9 +8311,9 @@
                 <a:solidFill>
                   <a:srgbClr val="FFFFFF"/>
                 </a:solidFill>
-                <a:latin typeface="Meiryo UI" pitchFamily="34" charset="0"/>
-                <a:ea typeface="Meiryo UI" pitchFamily="34" charset="-122"/>
-                <a:cs typeface="Meiryo UI" pitchFamily="34" charset="-120"/>
+                <a:latin typeface="Meiryo" pitchFamily="34" charset="0"/>
+                <a:ea typeface="Meiryo" pitchFamily="34" charset="-122"/>
+                <a:cs typeface="Meiryo" pitchFamily="34" charset="-120"/>
               </a:rPr>
               <a:t>金額</a:t>
             </a:r>
@@ -8736,9 +8375,9 @@
                 <a:solidFill>
                   <a:srgbClr val="1A2E35"/>
                 </a:solidFill>
-                <a:latin typeface="Meiryo UI" pitchFamily="34" charset="0"/>
-                <a:ea typeface="Meiryo UI" pitchFamily="34" charset="-122"/>
-                <a:cs typeface="Meiryo UI" pitchFamily="34" charset="-120"/>
+                <a:latin typeface="Meiryo" pitchFamily="34" charset="0"/>
+                <a:ea typeface="Meiryo" pitchFamily="34" charset="-122"/>
+                <a:cs typeface="Meiryo" pitchFamily="34" charset="-120"/>
               </a:rPr>
               <a:t>{{ITEM_1}}</a:t>
             </a:r>
@@ -8775,9 +8414,9 @@
                 <a:solidFill>
                   <a:srgbClr val="1A2E35"/>
                 </a:solidFill>
-                <a:latin typeface="Meiryo UI" pitchFamily="34" charset="0"/>
-                <a:ea typeface="Meiryo UI" pitchFamily="34" charset="-122"/>
-                <a:cs typeface="Meiryo UI" pitchFamily="34" charset="-120"/>
+                <a:latin typeface="Meiryo" pitchFamily="34" charset="0"/>
+                <a:ea typeface="Meiryo" pitchFamily="34" charset="-122"/>
+                <a:cs typeface="Meiryo" pitchFamily="34" charset="-120"/>
               </a:rPr>
               <a:t>{{DESC_1}}</a:t>
             </a:r>
@@ -8814,9 +8453,9 @@
                 <a:solidFill>
                   <a:srgbClr val="1A2E35"/>
                 </a:solidFill>
-                <a:latin typeface="Meiryo UI" pitchFamily="34" charset="0"/>
-                <a:ea typeface="Meiryo UI" pitchFamily="34" charset="-122"/>
-                <a:cs typeface="Meiryo UI" pitchFamily="34" charset="-120"/>
+                <a:latin typeface="Meiryo" pitchFamily="34" charset="0"/>
+                <a:ea typeface="Meiryo" pitchFamily="34" charset="-122"/>
+                <a:cs typeface="Meiryo" pitchFamily="34" charset="-120"/>
               </a:rPr>
               <a:t>{{QTY_1}}</a:t>
             </a:r>
@@ -8853,9 +8492,9 @@
                 <a:solidFill>
                   <a:srgbClr val="1A2E35"/>
                 </a:solidFill>
-                <a:latin typeface="Meiryo UI" pitchFamily="34" charset="0"/>
-                <a:ea typeface="Meiryo UI" pitchFamily="34" charset="-122"/>
-                <a:cs typeface="Meiryo UI" pitchFamily="34" charset="-120"/>
+                <a:latin typeface="Meiryo" pitchFamily="34" charset="0"/>
+                <a:ea typeface="Meiryo" pitchFamily="34" charset="-122"/>
+                <a:cs typeface="Meiryo" pitchFamily="34" charset="-120"/>
               </a:rPr>
               <a:t>{{PRICE_1}}</a:t>
             </a:r>
@@ -8892,9 +8531,9 @@
                 <a:solidFill>
                   <a:srgbClr val="1A2E35"/>
                 </a:solidFill>
-                <a:latin typeface="Meiryo UI" pitchFamily="34" charset="0"/>
-                <a:ea typeface="Meiryo UI" pitchFamily="34" charset="-122"/>
-                <a:cs typeface="Meiryo UI" pitchFamily="34" charset="-120"/>
+                <a:latin typeface="Meiryo" pitchFamily="34" charset="0"/>
+                <a:ea typeface="Meiryo" pitchFamily="34" charset="-122"/>
+                <a:cs typeface="Meiryo" pitchFamily="34" charset="-120"/>
               </a:rPr>
               <a:t>{{TOTAL_1}}</a:t>
             </a:r>
@@ -8956,9 +8595,9 @@
                 <a:solidFill>
                   <a:srgbClr val="1A2E35"/>
                 </a:solidFill>
-                <a:latin typeface="Meiryo UI" pitchFamily="34" charset="0"/>
-                <a:ea typeface="Meiryo UI" pitchFamily="34" charset="-122"/>
-                <a:cs typeface="Meiryo UI" pitchFamily="34" charset="-120"/>
+                <a:latin typeface="Meiryo" pitchFamily="34" charset="0"/>
+                <a:ea typeface="Meiryo" pitchFamily="34" charset="-122"/>
+                <a:cs typeface="Meiryo" pitchFamily="34" charset="-120"/>
               </a:rPr>
               <a:t>{{ITEM_2}}</a:t>
             </a:r>
@@ -8995,9 +8634,9 @@
                 <a:solidFill>
                   <a:srgbClr val="1A2E35"/>
                 </a:solidFill>
-                <a:latin typeface="Meiryo UI" pitchFamily="34" charset="0"/>
-                <a:ea typeface="Meiryo UI" pitchFamily="34" charset="-122"/>
-                <a:cs typeface="Meiryo UI" pitchFamily="34" charset="-120"/>
+                <a:latin typeface="Meiryo" pitchFamily="34" charset="0"/>
+                <a:ea typeface="Meiryo" pitchFamily="34" charset="-122"/>
+                <a:cs typeface="Meiryo" pitchFamily="34" charset="-120"/>
               </a:rPr>
               <a:t>{{DESC_2}}</a:t>
             </a:r>
@@ -9034,9 +8673,9 @@
                 <a:solidFill>
                   <a:srgbClr val="1A2E35"/>
                 </a:solidFill>
-                <a:latin typeface="Meiryo UI" pitchFamily="34" charset="0"/>
-                <a:ea typeface="Meiryo UI" pitchFamily="34" charset="-122"/>
-                <a:cs typeface="Meiryo UI" pitchFamily="34" charset="-120"/>
+                <a:latin typeface="Meiryo" pitchFamily="34" charset="0"/>
+                <a:ea typeface="Meiryo" pitchFamily="34" charset="-122"/>
+                <a:cs typeface="Meiryo" pitchFamily="34" charset="-120"/>
               </a:rPr>
               <a:t>{{QTY_2}}</a:t>
             </a:r>
@@ -9073,9 +8712,9 @@
                 <a:solidFill>
                   <a:srgbClr val="1A2E35"/>
                 </a:solidFill>
-                <a:latin typeface="Meiryo UI" pitchFamily="34" charset="0"/>
-                <a:ea typeface="Meiryo UI" pitchFamily="34" charset="-122"/>
-                <a:cs typeface="Meiryo UI" pitchFamily="34" charset="-120"/>
+                <a:latin typeface="Meiryo" pitchFamily="34" charset="0"/>
+                <a:ea typeface="Meiryo" pitchFamily="34" charset="-122"/>
+                <a:cs typeface="Meiryo" pitchFamily="34" charset="-120"/>
               </a:rPr>
               <a:t>{{PRICE_2}}</a:t>
             </a:r>
@@ -9112,9 +8751,9 @@
                 <a:solidFill>
                   <a:srgbClr val="1A2E35"/>
                 </a:solidFill>
-                <a:latin typeface="Meiryo UI" pitchFamily="34" charset="0"/>
-                <a:ea typeface="Meiryo UI" pitchFamily="34" charset="-122"/>
-                <a:cs typeface="Meiryo UI" pitchFamily="34" charset="-120"/>
+                <a:latin typeface="Meiryo" pitchFamily="34" charset="0"/>
+                <a:ea typeface="Meiryo" pitchFamily="34" charset="-122"/>
+                <a:cs typeface="Meiryo" pitchFamily="34" charset="-120"/>
               </a:rPr>
               <a:t>{{TOTAL_2}}</a:t>
             </a:r>
@@ -9176,9 +8815,9 @@
                 <a:solidFill>
                   <a:srgbClr val="1A2E35"/>
                 </a:solidFill>
-                <a:latin typeface="Meiryo UI" pitchFamily="34" charset="0"/>
-                <a:ea typeface="Meiryo UI" pitchFamily="34" charset="-122"/>
-                <a:cs typeface="Meiryo UI" pitchFamily="34" charset="-120"/>
+                <a:latin typeface="Meiryo" pitchFamily="34" charset="0"/>
+                <a:ea typeface="Meiryo" pitchFamily="34" charset="-122"/>
+                <a:cs typeface="Meiryo" pitchFamily="34" charset="-120"/>
               </a:rPr>
               <a:t>{{ITEM_3}}</a:t>
             </a:r>
@@ -9215,9 +8854,9 @@
                 <a:solidFill>
                   <a:srgbClr val="1A2E35"/>
                 </a:solidFill>
-                <a:latin typeface="Meiryo UI" pitchFamily="34" charset="0"/>
-                <a:ea typeface="Meiryo UI" pitchFamily="34" charset="-122"/>
-                <a:cs typeface="Meiryo UI" pitchFamily="34" charset="-120"/>
+                <a:latin typeface="Meiryo" pitchFamily="34" charset="0"/>
+                <a:ea typeface="Meiryo" pitchFamily="34" charset="-122"/>
+                <a:cs typeface="Meiryo" pitchFamily="34" charset="-120"/>
               </a:rPr>
               <a:t>{{DESC_3}}</a:t>
             </a:r>
@@ -9254,9 +8893,9 @@
                 <a:solidFill>
                   <a:srgbClr val="1A2E35"/>
                 </a:solidFill>
-                <a:latin typeface="Meiryo UI" pitchFamily="34" charset="0"/>
-                <a:ea typeface="Meiryo UI" pitchFamily="34" charset="-122"/>
-                <a:cs typeface="Meiryo UI" pitchFamily="34" charset="-120"/>
+                <a:latin typeface="Meiryo" pitchFamily="34" charset="0"/>
+                <a:ea typeface="Meiryo" pitchFamily="34" charset="-122"/>
+                <a:cs typeface="Meiryo" pitchFamily="34" charset="-120"/>
               </a:rPr>
               <a:t>{{QTY_3}}</a:t>
             </a:r>
@@ -9293,9 +8932,9 @@
                 <a:solidFill>
                   <a:srgbClr val="1A2E35"/>
                 </a:solidFill>
-                <a:latin typeface="Meiryo UI" pitchFamily="34" charset="0"/>
-                <a:ea typeface="Meiryo UI" pitchFamily="34" charset="-122"/>
-                <a:cs typeface="Meiryo UI" pitchFamily="34" charset="-120"/>
+                <a:latin typeface="Meiryo" pitchFamily="34" charset="0"/>
+                <a:ea typeface="Meiryo" pitchFamily="34" charset="-122"/>
+                <a:cs typeface="Meiryo" pitchFamily="34" charset="-120"/>
               </a:rPr>
               <a:t>{{PRICE_3}}</a:t>
             </a:r>
@@ -9332,9 +8971,9 @@
                 <a:solidFill>
                   <a:srgbClr val="1A2E35"/>
                 </a:solidFill>
-                <a:latin typeface="Meiryo UI" pitchFamily="34" charset="0"/>
-                <a:ea typeface="Meiryo UI" pitchFamily="34" charset="-122"/>
-                <a:cs typeface="Meiryo UI" pitchFamily="34" charset="-120"/>
+                <a:latin typeface="Meiryo" pitchFamily="34" charset="0"/>
+                <a:ea typeface="Meiryo" pitchFamily="34" charset="-122"/>
+                <a:cs typeface="Meiryo" pitchFamily="34" charset="-120"/>
               </a:rPr>
               <a:t>{{TOTAL_3}}</a:t>
             </a:r>
@@ -9396,9 +9035,9 @@
                 <a:solidFill>
                   <a:srgbClr val="1A2E35"/>
                 </a:solidFill>
-                <a:latin typeface="Meiryo UI" pitchFamily="34" charset="0"/>
-                <a:ea typeface="Meiryo UI" pitchFamily="34" charset="-122"/>
-                <a:cs typeface="Meiryo UI" pitchFamily="34" charset="-120"/>
+                <a:latin typeface="Meiryo" pitchFamily="34" charset="0"/>
+                <a:ea typeface="Meiryo" pitchFamily="34" charset="-122"/>
+                <a:cs typeface="Meiryo" pitchFamily="34" charset="-120"/>
               </a:rPr>
               <a:t>{{ITEM_4}}</a:t>
             </a:r>
@@ -9435,9 +9074,9 @@
                 <a:solidFill>
                   <a:srgbClr val="1A2E35"/>
                 </a:solidFill>
-                <a:latin typeface="Meiryo UI" pitchFamily="34" charset="0"/>
-                <a:ea typeface="Meiryo UI" pitchFamily="34" charset="-122"/>
-                <a:cs typeface="Meiryo UI" pitchFamily="34" charset="-120"/>
+                <a:latin typeface="Meiryo" pitchFamily="34" charset="0"/>
+                <a:ea typeface="Meiryo" pitchFamily="34" charset="-122"/>
+                <a:cs typeface="Meiryo" pitchFamily="34" charset="-120"/>
               </a:rPr>
               <a:t>{{DESC_4}}</a:t>
             </a:r>
@@ -9474,9 +9113,9 @@
                 <a:solidFill>
                   <a:srgbClr val="1A2E35"/>
                 </a:solidFill>
-                <a:latin typeface="Meiryo UI" pitchFamily="34" charset="0"/>
-                <a:ea typeface="Meiryo UI" pitchFamily="34" charset="-122"/>
-                <a:cs typeface="Meiryo UI" pitchFamily="34" charset="-120"/>
+                <a:latin typeface="Meiryo" pitchFamily="34" charset="0"/>
+                <a:ea typeface="Meiryo" pitchFamily="34" charset="-122"/>
+                <a:cs typeface="Meiryo" pitchFamily="34" charset="-120"/>
               </a:rPr>
               <a:t>{{QTY_4}}</a:t>
             </a:r>
@@ -9513,9 +9152,9 @@
                 <a:solidFill>
                   <a:srgbClr val="1A2E35"/>
                 </a:solidFill>
-                <a:latin typeface="Meiryo UI" pitchFamily="34" charset="0"/>
-                <a:ea typeface="Meiryo UI" pitchFamily="34" charset="-122"/>
-                <a:cs typeface="Meiryo UI" pitchFamily="34" charset="-120"/>
+                <a:latin typeface="Meiryo" pitchFamily="34" charset="0"/>
+                <a:ea typeface="Meiryo" pitchFamily="34" charset="-122"/>
+                <a:cs typeface="Meiryo" pitchFamily="34" charset="-120"/>
               </a:rPr>
               <a:t>{{PRICE_4}}</a:t>
             </a:r>
@@ -9552,9 +9191,9 @@
                 <a:solidFill>
                   <a:srgbClr val="1A2E35"/>
                 </a:solidFill>
-                <a:latin typeface="Meiryo UI" pitchFamily="34" charset="0"/>
-                <a:ea typeface="Meiryo UI" pitchFamily="34" charset="-122"/>
-                <a:cs typeface="Meiryo UI" pitchFamily="34" charset="-120"/>
+                <a:latin typeface="Meiryo" pitchFamily="34" charset="0"/>
+                <a:ea typeface="Meiryo" pitchFamily="34" charset="-122"/>
+                <a:cs typeface="Meiryo" pitchFamily="34" charset="-120"/>
               </a:rPr>
               <a:t>{{TOTAL_4}}</a:t>
             </a:r>
@@ -9579,11 +9218,8 @@
           <a:solidFill>
             <a:srgbClr val="006F8A"/>
           </a:solidFill>
-          <a:ln w="12700">
-            <a:solidFill>
-              <a:srgbClr val="333333"/>
-            </a:solidFill>
-            <a:prstDash val="solid"/>
+          <a:ln>
+            <a:noFill/>
           </a:ln>
         </p:spPr>
       </p:sp>
@@ -9616,9 +9252,9 @@
                 <a:solidFill>
                   <a:srgbClr val="FFFFFF"/>
                 </a:solidFill>
-                <a:latin typeface="Meiryo UI" pitchFamily="34" charset="0"/>
-                <a:ea typeface="Meiryo UI" pitchFamily="34" charset="-122"/>
-                <a:cs typeface="Meiryo UI" pitchFamily="34" charset="-120"/>
+                <a:latin typeface="Meiryo" pitchFamily="34" charset="0"/>
+                <a:ea typeface="Meiryo" pitchFamily="34" charset="-122"/>
+                <a:cs typeface="Meiryo" pitchFamily="34" charset="-120"/>
               </a:rPr>
               <a:t>合計（税抜）</a:t>
             </a:r>
@@ -9653,11 +9289,11 @@
             <a:r>
               <a:rPr lang="en-US" sz="1500" b="1" dirty="0">
                 <a:solidFill>
-                  <a:srgbClr val="F0A000"/>
-                </a:solidFill>
-                <a:latin typeface="Meiryo UI" pitchFamily="34" charset="0"/>
-                <a:ea typeface="Meiryo UI" pitchFamily="34" charset="-122"/>
-                <a:cs typeface="Meiryo UI" pitchFamily="34" charset="-120"/>
+                  <a:srgbClr val="0098BB"/>
+                </a:solidFill>
+                <a:latin typeface="Meiryo" pitchFamily="34" charset="0"/>
+                <a:ea typeface="Meiryo" pitchFamily="34" charset="-122"/>
+                <a:cs typeface="Meiryo" pitchFamily="34" charset="-120"/>
               </a:rPr>
               <a:t>{{GRAND_TOTAL}}</a:t>
             </a:r>
@@ -9694,9 +9330,9 @@
                 <a:solidFill>
                   <a:srgbClr val="7B9BA6"/>
                 </a:solidFill>
-                <a:latin typeface="Meiryo UI" pitchFamily="34" charset="0"/>
-                <a:ea typeface="Meiryo UI" pitchFamily="34" charset="-122"/>
-                <a:cs typeface="Meiryo UI" pitchFamily="34" charset="-120"/>
+                <a:latin typeface="Meiryo" pitchFamily="34" charset="0"/>
+                <a:ea typeface="Meiryo" pitchFamily="34" charset="-122"/>
+                <a:cs typeface="Meiryo" pitchFamily="34" charset="-120"/>
               </a:rPr>
               <a:t>※ {{PRICING_NOTE}}</a:t>
             </a:r>
@@ -9746,11 +9382,8 @@
           <a:solidFill>
             <a:srgbClr val="F4FBFD"/>
           </a:solidFill>
-          <a:ln w="12700">
-            <a:solidFill>
-              <a:srgbClr val="333333"/>
-            </a:solidFill>
-            <a:prstDash val="solid"/>
+          <a:ln>
+            <a:noFill/>
           </a:ln>
         </p:spPr>
       </p:sp>
@@ -9771,11 +9404,8 @@
           <a:solidFill>
             <a:srgbClr val="006F8A"/>
           </a:solidFill>
-          <a:ln w="12700">
-            <a:solidFill>
-              <a:srgbClr val="333333"/>
-            </a:solidFill>
-            <a:prstDash val="solid"/>
+          <a:ln>
+            <a:noFill/>
           </a:ln>
         </p:spPr>
       </p:sp>
@@ -9794,13 +9424,10 @@
             <a:avLst/>
           </a:prstGeom>
           <a:solidFill>
-            <a:srgbClr val="F0A000"/>
-          </a:solidFill>
-          <a:ln w="12700">
-            <a:solidFill>
-              <a:srgbClr val="333333"/>
-            </a:solidFill>
-            <a:prstDash val="solid"/>
+            <a:srgbClr val="0098BB"/>
+          </a:solidFill>
+          <a:ln>
+            <a:noFill/>
           </a:ln>
         </p:spPr>
       </p:sp>
@@ -9833,9 +9460,9 @@
                 <a:solidFill>
                   <a:srgbClr val="FFFFFF"/>
                 </a:solidFill>
-                <a:latin typeface="Meiryo UI" pitchFamily="34" charset="0"/>
-                <a:ea typeface="Meiryo UI" pitchFamily="34" charset="-122"/>
-                <a:cs typeface="Meiryo UI" pitchFamily="34" charset="-120"/>
+                <a:latin typeface="Meiryo" pitchFamily="34" charset="0"/>
+                <a:ea typeface="Meiryo" pitchFamily="34" charset="-122"/>
+                <a:cs typeface="Meiryo" pitchFamily="34" charset="-120"/>
               </a:rPr>
               <a:t>07   次のアクション</a:t>
             </a:r>
@@ -9860,11 +9487,8 @@
           <a:solidFill>
             <a:srgbClr val="006F8A"/>
           </a:solidFill>
-          <a:ln w="12700">
-            <a:solidFill>
-              <a:srgbClr val="333333"/>
-            </a:solidFill>
-            <a:prstDash val="solid"/>
+          <a:ln>
+            <a:noFill/>
           </a:ln>
         </p:spPr>
       </p:sp>
@@ -9897,9 +9521,9 @@
                 <a:solidFill>
                   <a:srgbClr val="AADDE8"/>
                 </a:solidFill>
-                <a:latin typeface="Meiryo UI" pitchFamily="34" charset="0"/>
-                <a:ea typeface="Meiryo UI" pitchFamily="34" charset="-122"/>
-                <a:cs typeface="Meiryo UI" pitchFamily="34" charset="-120"/>
+                <a:latin typeface="Meiryo" pitchFamily="34" charset="0"/>
+                <a:ea typeface="Meiryo" pitchFamily="34" charset="-122"/>
+                <a:cs typeface="Meiryo" pitchFamily="34" charset="-120"/>
               </a:rPr>
               <a:t>Novagrid</a:t>
             </a:r>
@@ -9936,9 +9560,9 @@
                 <a:solidFill>
                   <a:srgbClr val="AADDE8"/>
                 </a:solidFill>
-                <a:latin typeface="Meiryo UI" pitchFamily="34" charset="0"/>
-                <a:ea typeface="Meiryo UI" pitchFamily="34" charset="-122"/>
-                <a:cs typeface="Meiryo UI" pitchFamily="34" charset="-120"/>
+                <a:latin typeface="Meiryo" pitchFamily="34" charset="0"/>
+                <a:ea typeface="Meiryo" pitchFamily="34" charset="-122"/>
+                <a:cs typeface="Meiryo" pitchFamily="34" charset="-120"/>
               </a:rPr>
               <a:t>9 / 9</a:t>
             </a:r>
@@ -9963,11 +9587,8 @@
           <a:solidFill>
             <a:srgbClr val="0098BB"/>
           </a:solidFill>
-          <a:ln w="12700">
-            <a:solidFill>
-              <a:srgbClr val="333333"/>
-            </a:solidFill>
-            <a:prstDash val="solid"/>
+          <a:ln>
+            <a:noFill/>
           </a:ln>
         </p:spPr>
       </p:sp>
@@ -10000,9 +9621,9 @@
                 <a:solidFill>
                   <a:srgbClr val="AADDE8"/>
                 </a:solidFill>
-                <a:latin typeface="Meiryo UI" pitchFamily="34" charset="0"/>
-                <a:ea typeface="Meiryo UI" pitchFamily="34" charset="-122"/>
-                <a:cs typeface="Meiryo UI" pitchFamily="34" charset="-120"/>
+                <a:latin typeface="Meiryo" pitchFamily="34" charset="0"/>
+                <a:ea typeface="Meiryo" pitchFamily="34" charset="-122"/>
+                <a:cs typeface="Meiryo" pitchFamily="34" charset="-120"/>
               </a:rPr>
               <a:t>期限</a:t>
             </a:r>
@@ -10039,9 +9660,9 @@
                 <a:solidFill>
                   <a:srgbClr val="FFFFFF"/>
                 </a:solidFill>
-                <a:latin typeface="Meiryo UI" pitchFamily="34" charset="0"/>
-                <a:ea typeface="Meiryo UI" pitchFamily="34" charset="-122"/>
-                <a:cs typeface="Meiryo UI" pitchFamily="34" charset="-120"/>
+                <a:latin typeface="Meiryo" pitchFamily="34" charset="0"/>
+                <a:ea typeface="Meiryo" pitchFamily="34" charset="-122"/>
+                <a:cs typeface="Meiryo" pitchFamily="34" charset="-120"/>
               </a:rPr>
               <a:t>{{ACTION_1_DATE}}</a:t>
             </a:r>
@@ -10091,11 +9712,8 @@
           <a:solidFill>
             <a:srgbClr val="0098BB"/>
           </a:solidFill>
-          <a:ln w="12700">
-            <a:solidFill>
-              <a:srgbClr val="333333"/>
-            </a:solidFill>
-            <a:prstDash val="solid"/>
+          <a:ln>
+            <a:noFill/>
           </a:ln>
         </p:spPr>
       </p:sp>
@@ -10128,9 +9746,9 @@
                 <a:solidFill>
                   <a:srgbClr val="FFFFFF"/>
                 </a:solidFill>
-                <a:latin typeface="Meiryo UI" pitchFamily="34" charset="0"/>
-                <a:ea typeface="Meiryo UI" pitchFamily="34" charset="-122"/>
-                <a:cs typeface="Meiryo UI" pitchFamily="34" charset="-120"/>
+                <a:latin typeface="Meiryo" pitchFamily="34" charset="0"/>
+                <a:ea typeface="Meiryo" pitchFamily="34" charset="-122"/>
+                <a:cs typeface="Meiryo" pitchFamily="34" charset="-120"/>
               </a:rPr>
               <a:t>1</a:t>
             </a:r>
@@ -10170,9 +9788,9 @@
                 <a:solidFill>
                   <a:srgbClr val="1A2E35"/>
                 </a:solidFill>
-                <a:latin typeface="Meiryo UI" pitchFamily="34" charset="0"/>
-                <a:ea typeface="Meiryo UI" pitchFamily="34" charset="-122"/>
-                <a:cs typeface="Meiryo UI" pitchFamily="34" charset="-120"/>
+                <a:latin typeface="Meiryo" pitchFamily="34" charset="0"/>
+                <a:ea typeface="Meiryo" pitchFamily="34" charset="-122"/>
+                <a:cs typeface="Meiryo" pitchFamily="34" charset="-120"/>
               </a:rPr>
               <a:t>{{ACTION_1}}</a:t>
             </a:r>
@@ -10197,11 +9815,8 @@
           <a:solidFill>
             <a:srgbClr val="0098BB"/>
           </a:solidFill>
-          <a:ln w="12700">
-            <a:solidFill>
-              <a:srgbClr val="333333"/>
-            </a:solidFill>
-            <a:prstDash val="solid"/>
+          <a:ln>
+            <a:noFill/>
           </a:ln>
         </p:spPr>
       </p:sp>
@@ -10234,9 +9849,9 @@
                 <a:solidFill>
                   <a:srgbClr val="AADDE8"/>
                 </a:solidFill>
-                <a:latin typeface="Meiryo UI" pitchFamily="34" charset="0"/>
-                <a:ea typeface="Meiryo UI" pitchFamily="34" charset="-122"/>
-                <a:cs typeface="Meiryo UI" pitchFamily="34" charset="-120"/>
+                <a:latin typeface="Meiryo" pitchFamily="34" charset="0"/>
+                <a:ea typeface="Meiryo" pitchFamily="34" charset="-122"/>
+                <a:cs typeface="Meiryo" pitchFamily="34" charset="-120"/>
               </a:rPr>
               <a:t>期限</a:t>
             </a:r>
@@ -10273,9 +9888,9 @@
                 <a:solidFill>
                   <a:srgbClr val="FFFFFF"/>
                 </a:solidFill>
-                <a:latin typeface="Meiryo UI" pitchFamily="34" charset="0"/>
-                <a:ea typeface="Meiryo UI" pitchFamily="34" charset="-122"/>
-                <a:cs typeface="Meiryo UI" pitchFamily="34" charset="-120"/>
+                <a:latin typeface="Meiryo" pitchFamily="34" charset="0"/>
+                <a:ea typeface="Meiryo" pitchFamily="34" charset="-122"/>
+                <a:cs typeface="Meiryo" pitchFamily="34" charset="-120"/>
               </a:rPr>
               <a:t>{{ACTION_2_DATE}}</a:t>
             </a:r>
@@ -10325,11 +9940,8 @@
           <a:solidFill>
             <a:srgbClr val="0098BB"/>
           </a:solidFill>
-          <a:ln w="12700">
-            <a:solidFill>
-              <a:srgbClr val="333333"/>
-            </a:solidFill>
-            <a:prstDash val="solid"/>
+          <a:ln>
+            <a:noFill/>
           </a:ln>
         </p:spPr>
       </p:sp>
@@ -10362,9 +9974,9 @@
                 <a:solidFill>
                   <a:srgbClr val="FFFFFF"/>
                 </a:solidFill>
-                <a:latin typeface="Meiryo UI" pitchFamily="34" charset="0"/>
-                <a:ea typeface="Meiryo UI" pitchFamily="34" charset="-122"/>
-                <a:cs typeface="Meiryo UI" pitchFamily="34" charset="-120"/>
+                <a:latin typeface="Meiryo" pitchFamily="34" charset="0"/>
+                <a:ea typeface="Meiryo" pitchFamily="34" charset="-122"/>
+                <a:cs typeface="Meiryo" pitchFamily="34" charset="-120"/>
               </a:rPr>
               <a:t>2</a:t>
             </a:r>
@@ -10404,9 +10016,9 @@
                 <a:solidFill>
                   <a:srgbClr val="1A2E35"/>
                 </a:solidFill>
-                <a:latin typeface="Meiryo UI" pitchFamily="34" charset="0"/>
-                <a:ea typeface="Meiryo UI" pitchFamily="34" charset="-122"/>
-                <a:cs typeface="Meiryo UI" pitchFamily="34" charset="-120"/>
+                <a:latin typeface="Meiryo" pitchFamily="34" charset="0"/>
+                <a:ea typeface="Meiryo" pitchFamily="34" charset="-122"/>
+                <a:cs typeface="Meiryo" pitchFamily="34" charset="-120"/>
               </a:rPr>
               <a:t>{{ACTION_2}}</a:t>
             </a:r>
@@ -10431,11 +10043,8 @@
           <a:solidFill>
             <a:srgbClr val="0098BB"/>
           </a:solidFill>
-          <a:ln w="12700">
-            <a:solidFill>
-              <a:srgbClr val="333333"/>
-            </a:solidFill>
-            <a:prstDash val="solid"/>
+          <a:ln>
+            <a:noFill/>
           </a:ln>
         </p:spPr>
       </p:sp>
@@ -10468,9 +10077,9 @@
                 <a:solidFill>
                   <a:srgbClr val="AADDE8"/>
                 </a:solidFill>
-                <a:latin typeface="Meiryo UI" pitchFamily="34" charset="0"/>
-                <a:ea typeface="Meiryo UI" pitchFamily="34" charset="-122"/>
-                <a:cs typeface="Meiryo UI" pitchFamily="34" charset="-120"/>
+                <a:latin typeface="Meiryo" pitchFamily="34" charset="0"/>
+                <a:ea typeface="Meiryo" pitchFamily="34" charset="-122"/>
+                <a:cs typeface="Meiryo" pitchFamily="34" charset="-120"/>
               </a:rPr>
               <a:t>期限</a:t>
             </a:r>
@@ -10507,9 +10116,9 @@
                 <a:solidFill>
                   <a:srgbClr val="FFFFFF"/>
                 </a:solidFill>
-                <a:latin typeface="Meiryo UI" pitchFamily="34" charset="0"/>
-                <a:ea typeface="Meiryo UI" pitchFamily="34" charset="-122"/>
-                <a:cs typeface="Meiryo UI" pitchFamily="34" charset="-120"/>
+                <a:latin typeface="Meiryo" pitchFamily="34" charset="0"/>
+                <a:ea typeface="Meiryo" pitchFamily="34" charset="-122"/>
+                <a:cs typeface="Meiryo" pitchFamily="34" charset="-120"/>
               </a:rPr>
               <a:t>{{ACTION_3_DATE}}</a:t>
             </a:r>
@@ -10559,11 +10168,8 @@
           <a:solidFill>
             <a:srgbClr val="0098BB"/>
           </a:solidFill>
-          <a:ln w="12700">
-            <a:solidFill>
-              <a:srgbClr val="333333"/>
-            </a:solidFill>
-            <a:prstDash val="solid"/>
+          <a:ln>
+            <a:noFill/>
           </a:ln>
         </p:spPr>
       </p:sp>
@@ -10596,9 +10202,9 @@
                 <a:solidFill>
                   <a:srgbClr val="FFFFFF"/>
                 </a:solidFill>
-                <a:latin typeface="Meiryo UI" pitchFamily="34" charset="0"/>
-                <a:ea typeface="Meiryo UI" pitchFamily="34" charset="-122"/>
-                <a:cs typeface="Meiryo UI" pitchFamily="34" charset="-120"/>
+                <a:latin typeface="Meiryo" pitchFamily="34" charset="0"/>
+                <a:ea typeface="Meiryo" pitchFamily="34" charset="-122"/>
+                <a:cs typeface="Meiryo" pitchFamily="34" charset="-120"/>
               </a:rPr>
               <a:t>3</a:t>
             </a:r>
@@ -10638,9 +10244,9 @@
                 <a:solidFill>
                   <a:srgbClr val="1A2E35"/>
                 </a:solidFill>
-                <a:latin typeface="Meiryo UI" pitchFamily="34" charset="0"/>
-                <a:ea typeface="Meiryo UI" pitchFamily="34" charset="-122"/>
-                <a:cs typeface="Meiryo UI" pitchFamily="34" charset="-120"/>
+                <a:latin typeface="Meiryo" pitchFamily="34" charset="0"/>
+                <a:ea typeface="Meiryo" pitchFamily="34" charset="-122"/>
+                <a:cs typeface="Meiryo" pitchFamily="34" charset="-120"/>
               </a:rPr>
               <a:t>{{ACTION_3}}</a:t>
             </a:r>
@@ -10702,9 +10308,9 @@
                 <a:solidFill>
                   <a:srgbClr val="006F8A"/>
                 </a:solidFill>
-                <a:latin typeface="Meiryo UI" pitchFamily="34" charset="0"/>
-                <a:ea typeface="Meiryo UI" pitchFamily="34" charset="-122"/>
-                <a:cs typeface="Meiryo UI" pitchFamily="34" charset="-120"/>
+                <a:latin typeface="Meiryo" pitchFamily="34" charset="0"/>
+                <a:ea typeface="Meiryo" pitchFamily="34" charset="-122"/>
+                <a:cs typeface="Meiryo" pitchFamily="34" charset="-120"/>
               </a:rPr>
               <a:t>ご質問・ご不明点は担当 {{YOUR_COMPANY}} までお気軽にお申し付けください。</a:t>
             </a:r>
